--- a/ParallelLSTM/result/성능개선 3 , 4 통합 결과 2.pptx
+++ b/ParallelLSTM/result/성능개선 3 , 4 통합 결과 2.pptx
@@ -281,7 +281,7 @@
           <a:p>
             <a:fld id="{B72759B8-7332-44BD-B1FF-13450B6DA7DC}" type="datetimeFigureOut">
               <a:rPr lang="ko-KR" altLang="en-US" smtClean="0"/>
-              <a:t>2026-01-16</a:t>
+              <a:t>2026-01-19</a:t>
             </a:fld>
             <a:endParaRPr lang="ko-KR" altLang="en-US"/>
           </a:p>
@@ -451,7 +451,7 @@
           <a:p>
             <a:fld id="{B72759B8-7332-44BD-B1FF-13450B6DA7DC}" type="datetimeFigureOut">
               <a:rPr lang="ko-KR" altLang="en-US" smtClean="0"/>
-              <a:t>2026-01-16</a:t>
+              <a:t>2026-01-19</a:t>
             </a:fld>
             <a:endParaRPr lang="ko-KR" altLang="en-US"/>
           </a:p>
@@ -631,7 +631,7 @@
           <a:p>
             <a:fld id="{B72759B8-7332-44BD-B1FF-13450B6DA7DC}" type="datetimeFigureOut">
               <a:rPr lang="ko-KR" altLang="en-US" smtClean="0"/>
-              <a:t>2026-01-16</a:t>
+              <a:t>2026-01-19</a:t>
             </a:fld>
             <a:endParaRPr lang="ko-KR" altLang="en-US"/>
           </a:p>
@@ -801,7 +801,7 @@
           <a:p>
             <a:fld id="{B72759B8-7332-44BD-B1FF-13450B6DA7DC}" type="datetimeFigureOut">
               <a:rPr lang="ko-KR" altLang="en-US" smtClean="0"/>
-              <a:t>2026-01-16</a:t>
+              <a:t>2026-01-19</a:t>
             </a:fld>
             <a:endParaRPr lang="ko-KR" altLang="en-US"/>
           </a:p>
@@ -1052,7 +1052,7 @@
           <a:p>
             <a:fld id="{B72759B8-7332-44BD-B1FF-13450B6DA7DC}" type="datetimeFigureOut">
               <a:rPr lang="ko-KR" altLang="en-US" smtClean="0"/>
-              <a:t>2026-01-16</a:t>
+              <a:t>2026-01-19</a:t>
             </a:fld>
             <a:endParaRPr lang="ko-KR" altLang="en-US"/>
           </a:p>
@@ -1284,7 +1284,7 @@
           <a:p>
             <a:fld id="{B72759B8-7332-44BD-B1FF-13450B6DA7DC}" type="datetimeFigureOut">
               <a:rPr lang="ko-KR" altLang="en-US" smtClean="0"/>
-              <a:t>2026-01-16</a:t>
+              <a:t>2026-01-19</a:t>
             </a:fld>
             <a:endParaRPr lang="ko-KR" altLang="en-US"/>
           </a:p>
@@ -1631,7 +1631,7 @@
           <a:p>
             <a:fld id="{B72759B8-7332-44BD-B1FF-13450B6DA7DC}" type="datetimeFigureOut">
               <a:rPr lang="ko-KR" altLang="en-US" smtClean="0"/>
-              <a:t>2026-01-16</a:t>
+              <a:t>2026-01-19</a:t>
             </a:fld>
             <a:endParaRPr lang="ko-KR" altLang="en-US"/>
           </a:p>
@@ -1749,7 +1749,7 @@
           <a:p>
             <a:fld id="{B72759B8-7332-44BD-B1FF-13450B6DA7DC}" type="datetimeFigureOut">
               <a:rPr lang="ko-KR" altLang="en-US" smtClean="0"/>
-              <a:t>2026-01-16</a:t>
+              <a:t>2026-01-19</a:t>
             </a:fld>
             <a:endParaRPr lang="ko-KR" altLang="en-US"/>
           </a:p>
@@ -1867,7 +1867,7 @@
           <a:p>
             <a:fld id="{B72759B8-7332-44BD-B1FF-13450B6DA7DC}" type="datetimeFigureOut">
               <a:rPr lang="ko-KR" altLang="en-US" smtClean="0"/>
-              <a:t>2026-01-16</a:t>
+              <a:t>2026-01-19</a:t>
             </a:fld>
             <a:endParaRPr lang="ko-KR" altLang="en-US"/>
           </a:p>
@@ -2151,7 +2151,7 @@
           <a:p>
             <a:fld id="{B72759B8-7332-44BD-B1FF-13450B6DA7DC}" type="datetimeFigureOut">
               <a:rPr lang="ko-KR" altLang="en-US" smtClean="0"/>
-              <a:t>2026-01-16</a:t>
+              <a:t>2026-01-19</a:t>
             </a:fld>
             <a:endParaRPr lang="ko-KR" altLang="en-US"/>
           </a:p>
@@ -2415,7 +2415,7 @@
           <a:p>
             <a:fld id="{B72759B8-7332-44BD-B1FF-13450B6DA7DC}" type="datetimeFigureOut">
               <a:rPr lang="ko-KR" altLang="en-US" smtClean="0"/>
-              <a:t>2026-01-16</a:t>
+              <a:t>2026-01-19</a:t>
             </a:fld>
             <a:endParaRPr lang="ko-KR" altLang="en-US"/>
           </a:p>
@@ -2629,7 +2629,7 @@
           <a:p>
             <a:fld id="{B72759B8-7332-44BD-B1FF-13450B6DA7DC}" type="datetimeFigureOut">
               <a:rPr lang="ko-KR" altLang="en-US" smtClean="0"/>
-              <a:t>2026-01-16</a:t>
+              <a:t>2026-01-19</a:t>
             </a:fld>
             <a:endParaRPr lang="ko-KR" altLang="en-US"/>
           </a:p>
@@ -3564,7 +3564,7 @@
           <p:nvPr>
             <p:extLst>
               <p:ext uri="{D42A27DB-BD31-4B8C-83A1-F6EECF244321}">
-                <p14:modId xmlns:p14="http://schemas.microsoft.com/office/powerpoint/2010/main" val="3596127470"/>
+                <p14:modId xmlns:p14="http://schemas.microsoft.com/office/powerpoint/2010/main" val="1156575353"/>
               </p:ext>
             </p:extLst>
           </p:nvPr>
@@ -3742,7 +3742,11 @@
                         <a:t>r2 : </a:t>
                       </a:r>
                       <a:r>
-                        <a:rPr lang="en-US" altLang="ko-KR" sz="1400" dirty="0"/>
+                        <a:rPr lang="en-US" altLang="ko-KR" sz="1400" dirty="0">
+                          <a:solidFill>
+                            <a:srgbClr val="FF0000"/>
+                          </a:solidFill>
+                        </a:rPr>
                         <a:t>0.0705</a:t>
                       </a:r>
                       <a:endParaRPr lang="pt-BR" altLang="ko-KR" sz="1400" dirty="0">
@@ -3822,7 +3826,11 @@
                         <a:t>r2 : </a:t>
                       </a:r>
                       <a:r>
-                        <a:rPr lang="en-US" altLang="ko-KR" sz="1400" dirty="0"/>
+                        <a:rPr lang="en-US" altLang="ko-KR" sz="1400" dirty="0">
+                          <a:solidFill>
+                            <a:srgbClr val="FF0000"/>
+                          </a:solidFill>
+                        </a:rPr>
                         <a:t>0.5522</a:t>
                       </a:r>
                       <a:endParaRPr lang="pt-BR" altLang="ko-KR" sz="1400" dirty="0">
@@ -4139,10 +4147,10 @@
       </p:grpSpPr>
       <p:pic>
         <p:nvPicPr>
-          <p:cNvPr id="30" name="그림 29">
-            <a:extLst>
-              <a:ext uri="{FF2B5EF4-FFF2-40B4-BE49-F238E27FC236}">
-                <a16:creationId xmlns:a16="http://schemas.microsoft.com/office/drawing/2014/main" id="{34B44F8C-A4EF-4214-B85D-838A2A05ADA5}"/>
+          <p:cNvPr id="20" name="그림 19">
+            <a:extLst>
+              <a:ext uri="{FF2B5EF4-FFF2-40B4-BE49-F238E27FC236}">
+                <a16:creationId xmlns:a16="http://schemas.microsoft.com/office/drawing/2014/main" id="{BCB3C7C1-CA00-4723-BC08-A49294D38BEA}"/>
               </a:ext>
             </a:extLst>
           </p:cNvPr>
@@ -4165,8 +4173,8 @@
         </p:blipFill>
         <p:spPr>
           <a:xfrm>
-            <a:off x="9777055" y="5418253"/>
-            <a:ext cx="2114397" cy="1110058"/>
+            <a:off x="7419558" y="640550"/>
+            <a:ext cx="4470398" cy="676963"/>
           </a:xfrm>
           <a:prstGeom prst="rect">
             <a:avLst/>
@@ -4175,10 +4183,10 @@
       </p:pic>
       <p:pic>
         <p:nvPicPr>
-          <p:cNvPr id="31" name="그림 30">
-            <a:extLst>
-              <a:ext uri="{FF2B5EF4-FFF2-40B4-BE49-F238E27FC236}">
-                <a16:creationId xmlns:a16="http://schemas.microsoft.com/office/drawing/2014/main" id="{D1DF17EE-4843-4A32-BDAC-03BBE1594C62}"/>
+          <p:cNvPr id="30" name="그림 29">
+            <a:extLst>
+              <a:ext uri="{FF2B5EF4-FFF2-40B4-BE49-F238E27FC236}">
+                <a16:creationId xmlns:a16="http://schemas.microsoft.com/office/drawing/2014/main" id="{34B44F8C-A4EF-4214-B85D-838A2A05ADA5}"/>
               </a:ext>
             </a:extLst>
           </p:cNvPr>
@@ -4201,8 +4209,44 @@
         </p:blipFill>
         <p:spPr>
           <a:xfrm>
-            <a:off x="9767009" y="1405847"/>
-            <a:ext cx="2121773" cy="1100669"/>
+            <a:off x="9777055" y="5418253"/>
+            <a:ext cx="2114397" cy="1110058"/>
+          </a:xfrm>
+          <a:prstGeom prst="rect">
+            <a:avLst/>
+          </a:prstGeom>
+        </p:spPr>
+      </p:pic>
+      <p:pic>
+        <p:nvPicPr>
+          <p:cNvPr id="31" name="그림 30">
+            <a:extLst>
+              <a:ext uri="{FF2B5EF4-FFF2-40B4-BE49-F238E27FC236}">
+                <a16:creationId xmlns:a16="http://schemas.microsoft.com/office/drawing/2014/main" id="{D1DF17EE-4843-4A32-BDAC-03BBE1594C62}"/>
+              </a:ext>
+            </a:extLst>
+          </p:cNvPr>
+          <p:cNvPicPr>
+            <a:picLocks noChangeAspect="1"/>
+          </p:cNvPicPr>
+          <p:nvPr/>
+        </p:nvPicPr>
+        <p:blipFill>
+          <a:blip r:embed="rId4">
+            <a:extLst>
+              <a:ext uri="{28A0092B-C50C-407E-A947-70E740481C1C}">
+                <a14:useLocalDpi xmlns:a14="http://schemas.microsoft.com/office/drawing/2010/main" val="0"/>
+              </a:ext>
+            </a:extLst>
+          </a:blip>
+          <a:stretch>
+            <a:fillRect/>
+          </a:stretch>
+        </p:blipFill>
+        <p:spPr>
+          <a:xfrm>
+            <a:off x="9775367" y="1405847"/>
+            <a:ext cx="2105056" cy="1100669"/>
           </a:xfrm>
           <a:prstGeom prst="rect">
             <a:avLst/>
@@ -4261,7 +4305,7 @@
           <p:nvPr/>
         </p:nvPicPr>
         <p:blipFill>
-          <a:blip r:embed="rId4">
+          <a:blip r:embed="rId5">
             <a:extLst>
               <a:ext uri="{28A0092B-C50C-407E-A947-70E740481C1C}">
                 <a14:useLocalDpi xmlns:a14="http://schemas.microsoft.com/office/drawing/2010/main" val="0"/>
@@ -4323,42 +4367,6 @@
           </a:p>
         </p:txBody>
       </p:sp>
-      <p:pic>
-        <p:nvPicPr>
-          <p:cNvPr id="25" name="그림 24">
-            <a:extLst>
-              <a:ext uri="{FF2B5EF4-FFF2-40B4-BE49-F238E27FC236}">
-                <a16:creationId xmlns:a16="http://schemas.microsoft.com/office/drawing/2014/main" id="{A856132F-CBFF-4D9E-8989-4CB996C9FA0D}"/>
-              </a:ext>
-            </a:extLst>
-          </p:cNvPr>
-          <p:cNvPicPr>
-            <a:picLocks noChangeAspect="1"/>
-          </p:cNvPicPr>
-          <p:nvPr/>
-        </p:nvPicPr>
-        <p:blipFill>
-          <a:blip r:embed="rId5">
-            <a:extLst>
-              <a:ext uri="{28A0092B-C50C-407E-A947-70E740481C1C}">
-                <a14:useLocalDpi xmlns:a14="http://schemas.microsoft.com/office/drawing/2010/main" val="0"/>
-              </a:ext>
-            </a:extLst>
-          </a:blip>
-          <a:stretch>
-            <a:fillRect/>
-          </a:stretch>
-        </p:blipFill>
-        <p:spPr>
-          <a:xfrm>
-            <a:off x="7419558" y="638495"/>
-            <a:ext cx="4470398" cy="681074"/>
-          </a:xfrm>
-          <a:prstGeom prst="rect">
-            <a:avLst/>
-          </a:prstGeom>
-        </p:spPr>
-      </p:pic>
       <p:pic>
         <p:nvPicPr>
           <p:cNvPr id="29" name="그림 28">
@@ -4598,7 +4606,7 @@
           <p:nvPr>
             <p:extLst>
               <p:ext uri="{D42A27DB-BD31-4B8C-83A1-F6EECF244321}">
-                <p14:modId xmlns:p14="http://schemas.microsoft.com/office/powerpoint/2010/main" val="291092214"/>
+                <p14:modId xmlns:p14="http://schemas.microsoft.com/office/powerpoint/2010/main" val="789000676"/>
               </p:ext>
             </p:extLst>
           </p:nvPr>
@@ -4697,14 +4705,13 @@
                         <a:t>r2 : </a:t>
                       </a:r>
                       <a:r>
-                        <a:rPr lang="en-US" altLang="ko-KR" sz="1400" dirty="0"/>
-                        <a:t>0.4791</a:t>
-                      </a:r>
-                      <a:endParaRPr lang="en-US" altLang="ko-KR" sz="1400" dirty="0">
-                        <a:solidFill>
-                          <a:srgbClr val="FF0000"/>
-                        </a:solidFill>
-                      </a:endParaRPr>
+                        <a:rPr lang="en-US" altLang="ko-KR" sz="1400" dirty="0">
+                          <a:solidFill>
+                            <a:srgbClr val="FF0000"/>
+                          </a:solidFill>
+                        </a:rPr>
+                        <a:t>0.2477</a:t>
+                      </a:r>
                     </a:p>
                     <a:p>
                       <a:pPr algn="ctr"/>
@@ -4714,7 +4721,7 @@
                       </a:r>
                       <a:r>
                         <a:rPr lang="en-US" altLang="ko-KR" sz="1400" dirty="0"/>
-                        <a:t>0.0278</a:t>
+                        <a:t>0.0357</a:t>
                       </a:r>
                     </a:p>
                     <a:p>
@@ -4725,7 +4732,7 @@
                       </a:r>
                       <a:r>
                         <a:rPr lang="en-US" altLang="ko-KR" sz="1400" dirty="0"/>
-                        <a:t>0.1245</a:t>
+                        <a:t>0.1554</a:t>
                       </a:r>
                     </a:p>
                     <a:p>
@@ -4736,7 +4743,7 @@
                       </a:r>
                       <a:r>
                         <a:rPr lang="en-US" altLang="ko-KR" sz="1400" dirty="0"/>
-                        <a:t>0.1667</a:t>
+                        <a:t>0.1891</a:t>
                       </a:r>
                       <a:endParaRPr lang="pt-BR" altLang="ko-KR" sz="1400" dirty="0"/>
                     </a:p>
@@ -4852,7 +4859,11 @@
                         <a:t>r2 : </a:t>
                       </a:r>
                       <a:r>
-                        <a:rPr lang="en-US" altLang="ko-KR" sz="1400" dirty="0"/>
+                        <a:rPr lang="en-US" altLang="ko-KR" sz="1400" dirty="0">
+                          <a:solidFill>
+                            <a:srgbClr val="FF0000"/>
+                          </a:solidFill>
+                        </a:rPr>
                         <a:t>0.6156</a:t>
                       </a:r>
                       <a:endParaRPr lang="pt-BR" altLang="ko-KR" sz="1400" dirty="0">
@@ -7816,8 +7827,8 @@
         </p:blipFill>
         <p:spPr>
           <a:xfrm>
-            <a:off x="9758527" y="1400911"/>
-            <a:ext cx="2138738" cy="1110541"/>
+            <a:off x="9758527" y="1401571"/>
+            <a:ext cx="2138738" cy="1109221"/>
           </a:xfrm>
           <a:prstGeom prst="rect">
             <a:avLst/>
@@ -7940,10 +7951,10 @@
       </p:sp>
       <p:pic>
         <p:nvPicPr>
-          <p:cNvPr id="25" name="그림 24">
-            <a:extLst>
-              <a:ext uri="{FF2B5EF4-FFF2-40B4-BE49-F238E27FC236}">
-                <a16:creationId xmlns:a16="http://schemas.microsoft.com/office/drawing/2014/main" id="{A856132F-CBFF-4D9E-8989-4CB996C9FA0D}"/>
+          <p:cNvPr id="29" name="그림 28">
+            <a:extLst>
+              <a:ext uri="{FF2B5EF4-FFF2-40B4-BE49-F238E27FC236}">
+                <a16:creationId xmlns:a16="http://schemas.microsoft.com/office/drawing/2014/main" id="{F0A24E53-BC5F-406A-B389-C934D6A43912}"/>
               </a:ext>
             </a:extLst>
           </p:cNvPr>
@@ -7966,8 +7977,8 @@
         </p:blipFill>
         <p:spPr>
           <a:xfrm>
-            <a:off x="7466229" y="638495"/>
-            <a:ext cx="4431036" cy="681074"/>
+            <a:off x="7466229" y="2638010"/>
+            <a:ext cx="4437903" cy="691693"/>
           </a:xfrm>
           <a:prstGeom prst="rect">
             <a:avLst/>
@@ -7976,10 +7987,10 @@
       </p:pic>
       <p:pic>
         <p:nvPicPr>
-          <p:cNvPr id="29" name="그림 28">
-            <a:extLst>
-              <a:ext uri="{FF2B5EF4-FFF2-40B4-BE49-F238E27FC236}">
-                <a16:creationId xmlns:a16="http://schemas.microsoft.com/office/drawing/2014/main" id="{F0A24E53-BC5F-406A-B389-C934D6A43912}"/>
+          <p:cNvPr id="32" name="그림 31">
+            <a:extLst>
+              <a:ext uri="{FF2B5EF4-FFF2-40B4-BE49-F238E27FC236}">
+                <a16:creationId xmlns:a16="http://schemas.microsoft.com/office/drawing/2014/main" id="{C9502D35-AD74-4DC1-A9D3-A38E8588E734}"/>
               </a:ext>
             </a:extLst>
           </p:cNvPr>
@@ -8002,8 +8013,8 @@
         </p:blipFill>
         <p:spPr>
           <a:xfrm>
-            <a:off x="7466229" y="2638010"/>
-            <a:ext cx="4437903" cy="691693"/>
+            <a:off x="7473097" y="4648144"/>
+            <a:ext cx="4431036" cy="689782"/>
           </a:xfrm>
           <a:prstGeom prst="rect">
             <a:avLst/>
@@ -8012,10 +8023,10 @@
       </p:pic>
       <p:pic>
         <p:nvPicPr>
-          <p:cNvPr id="32" name="그림 31">
-            <a:extLst>
-              <a:ext uri="{FF2B5EF4-FFF2-40B4-BE49-F238E27FC236}">
-                <a16:creationId xmlns:a16="http://schemas.microsoft.com/office/drawing/2014/main" id="{C9502D35-AD74-4DC1-A9D3-A38E8588E734}"/>
+          <p:cNvPr id="54" name="그림 53">
+            <a:extLst>
+              <a:ext uri="{FF2B5EF4-FFF2-40B4-BE49-F238E27FC236}">
+                <a16:creationId xmlns:a16="http://schemas.microsoft.com/office/drawing/2014/main" id="{E587D4D1-B5AD-4F84-A9EC-ACF0F37209F1}"/>
               </a:ext>
             </a:extLst>
           </p:cNvPr>
@@ -8038,20 +8049,23 @@
         </p:blipFill>
         <p:spPr>
           <a:xfrm>
-            <a:off x="7473097" y="4648144"/>
-            <a:ext cx="4431036" cy="689782"/>
-          </a:xfrm>
-          <a:prstGeom prst="rect">
-            <a:avLst/>
-          </a:prstGeom>
+            <a:off x="7583587" y="1395140"/>
+            <a:ext cx="2105544" cy="1094271"/>
+          </a:xfrm>
+          <a:prstGeom prst="rect">
+            <a:avLst/>
+          </a:prstGeom>
+          <a:solidFill>
+            <a:schemeClr val="bg1"/>
+          </a:solidFill>
         </p:spPr>
       </p:pic>
       <p:pic>
         <p:nvPicPr>
-          <p:cNvPr id="54" name="그림 53">
-            <a:extLst>
-              <a:ext uri="{FF2B5EF4-FFF2-40B4-BE49-F238E27FC236}">
-                <a16:creationId xmlns:a16="http://schemas.microsoft.com/office/drawing/2014/main" id="{E587D4D1-B5AD-4F84-A9EC-ACF0F37209F1}"/>
+          <p:cNvPr id="55" name="그림 54">
+            <a:extLst>
+              <a:ext uri="{FF2B5EF4-FFF2-40B4-BE49-F238E27FC236}">
+                <a16:creationId xmlns:a16="http://schemas.microsoft.com/office/drawing/2014/main" id="{92EB87C0-99F4-4D4D-BA7D-BBD8C5BA250D}"/>
               </a:ext>
             </a:extLst>
           </p:cNvPr>
@@ -8074,45 +8088,6 @@
         </p:blipFill>
         <p:spPr>
           <a:xfrm>
-            <a:off x="7583587" y="1395140"/>
-            <a:ext cx="2105544" cy="1094271"/>
-          </a:xfrm>
-          <a:prstGeom prst="rect">
-            <a:avLst/>
-          </a:prstGeom>
-          <a:solidFill>
-            <a:schemeClr val="bg1"/>
-          </a:solidFill>
-        </p:spPr>
-      </p:pic>
-      <p:pic>
-        <p:nvPicPr>
-          <p:cNvPr id="55" name="그림 54">
-            <a:extLst>
-              <a:ext uri="{FF2B5EF4-FFF2-40B4-BE49-F238E27FC236}">
-                <a16:creationId xmlns:a16="http://schemas.microsoft.com/office/drawing/2014/main" id="{92EB87C0-99F4-4D4D-BA7D-BBD8C5BA250D}"/>
-              </a:ext>
-            </a:extLst>
-          </p:cNvPr>
-          <p:cNvPicPr>
-            <a:picLocks noChangeAspect="1"/>
-          </p:cNvPicPr>
-          <p:nvPr/>
-        </p:nvPicPr>
-        <p:blipFill>
-          <a:blip r:embed="rId9">
-            <a:extLst>
-              <a:ext uri="{28A0092B-C50C-407E-A947-70E740481C1C}">
-                <a14:useLocalDpi xmlns:a14="http://schemas.microsoft.com/office/drawing/2010/main" val="0"/>
-              </a:ext>
-            </a:extLst>
-          </a:blip>
-          <a:stretch>
-            <a:fillRect/>
-          </a:stretch>
-        </p:blipFill>
-        <p:spPr>
-          <a:xfrm>
             <a:off x="7602753" y="3365927"/>
             <a:ext cx="2103138" cy="1086475"/>
           </a:xfrm>
@@ -8136,7 +8111,7 @@
           <p:nvPr/>
         </p:nvPicPr>
         <p:blipFill>
-          <a:blip r:embed="rId10">
+          <a:blip r:embed="rId9">
             <a:extLst>
               <a:ext uri="{28A0092B-C50C-407E-A947-70E740481C1C}">
                 <a14:useLocalDpi xmlns:a14="http://schemas.microsoft.com/office/drawing/2010/main" val="0"/>
@@ -8372,7 +8347,7 @@
           <p:nvPr>
             <p:extLst>
               <p:ext uri="{D42A27DB-BD31-4B8C-83A1-F6EECF244321}">
-                <p14:modId xmlns:p14="http://schemas.microsoft.com/office/powerpoint/2010/main" val="3661414299"/>
+                <p14:modId xmlns:p14="http://schemas.microsoft.com/office/powerpoint/2010/main" val="1951396432"/>
               </p:ext>
             </p:extLst>
           </p:nvPr>
@@ -8476,7 +8451,7 @@
                             <a:srgbClr val="FF0000"/>
                           </a:solidFill>
                         </a:rPr>
-                        <a:t>0.1947</a:t>
+                        <a:t>0.6718</a:t>
                       </a:r>
                     </a:p>
                     <a:p>
@@ -8487,7 +8462,7 @@
                       </a:r>
                       <a:r>
                         <a:rPr lang="en-US" altLang="ko-KR" sz="1400" dirty="0"/>
-                        <a:t>0.07504</a:t>
+                        <a:t>0.0265</a:t>
                       </a:r>
                     </a:p>
                     <a:p>
@@ -8498,7 +8473,7 @@
                       </a:r>
                       <a:r>
                         <a:rPr lang="en-US" altLang="ko-KR" sz="1400" dirty="0"/>
-                        <a:t>0.2080</a:t>
+                        <a:t>0.0894</a:t>
                       </a:r>
                     </a:p>
                     <a:p>
@@ -8509,7 +8484,7 @@
                       </a:r>
                       <a:r>
                         <a:rPr lang="en-US" altLang="ko-KR" sz="1400" dirty="0"/>
-                        <a:t>0.2739</a:t>
+                        <a:t>0.1629</a:t>
                       </a:r>
                       <a:endParaRPr lang="pt-BR" altLang="ko-KR" sz="1400" dirty="0"/>
                     </a:p>
@@ -8739,6 +8714,42 @@
           </a:p>
         </p:txBody>
       </p:sp>
+      <p:pic>
+        <p:nvPicPr>
+          <p:cNvPr id="19" name="그림 18">
+            <a:extLst>
+              <a:ext uri="{FF2B5EF4-FFF2-40B4-BE49-F238E27FC236}">
+                <a16:creationId xmlns:a16="http://schemas.microsoft.com/office/drawing/2014/main" id="{68045030-2C22-42A0-ABB7-F0D99525D3E2}"/>
+              </a:ext>
+            </a:extLst>
+          </p:cNvPr>
+          <p:cNvPicPr>
+            <a:picLocks noChangeAspect="1"/>
+          </p:cNvPicPr>
+          <p:nvPr/>
+        </p:nvPicPr>
+        <p:blipFill>
+          <a:blip r:embed="rId10">
+            <a:extLst>
+              <a:ext uri="{28A0092B-C50C-407E-A947-70E740481C1C}">
+                <a14:useLocalDpi xmlns:a14="http://schemas.microsoft.com/office/drawing/2010/main" val="0"/>
+              </a:ext>
+            </a:extLst>
+          </a:blip>
+          <a:stretch>
+            <a:fillRect/>
+          </a:stretch>
+        </p:blipFill>
+        <p:spPr>
+          <a:xfrm>
+            <a:off x="7466229" y="641227"/>
+            <a:ext cx="4431036" cy="675611"/>
+          </a:xfrm>
+          <a:prstGeom prst="rect">
+            <a:avLst/>
+          </a:prstGeom>
+        </p:spPr>
+      </p:pic>
     </p:spTree>
     <p:extLst>
       <p:ext uri="{BB962C8B-B14F-4D97-AF65-F5344CB8AC3E}">
@@ -9853,8 +9864,8 @@
         </p:blipFill>
         <p:spPr>
           <a:xfrm>
-            <a:off x="9767009" y="1398226"/>
-            <a:ext cx="2121773" cy="1115911"/>
+            <a:off x="9772512" y="1398226"/>
+            <a:ext cx="2110766" cy="1115911"/>
           </a:xfrm>
           <a:prstGeom prst="rect">
             <a:avLst/>
@@ -9977,10 +9988,10 @@
       </p:sp>
       <p:pic>
         <p:nvPicPr>
-          <p:cNvPr id="25" name="그림 24">
-            <a:extLst>
-              <a:ext uri="{FF2B5EF4-FFF2-40B4-BE49-F238E27FC236}">
-                <a16:creationId xmlns:a16="http://schemas.microsoft.com/office/drawing/2014/main" id="{A856132F-CBFF-4D9E-8989-4CB996C9FA0D}"/>
+          <p:cNvPr id="29" name="그림 28">
+            <a:extLst>
+              <a:ext uri="{FF2B5EF4-FFF2-40B4-BE49-F238E27FC236}">
+                <a16:creationId xmlns:a16="http://schemas.microsoft.com/office/drawing/2014/main" id="{F0A24E53-BC5F-406A-B389-C934D6A43912}"/>
               </a:ext>
             </a:extLst>
           </p:cNvPr>
@@ -10003,8 +10014,8 @@
         </p:blipFill>
         <p:spPr>
           <a:xfrm>
-            <a:off x="7419558" y="638495"/>
-            <a:ext cx="4470398" cy="681074"/>
+            <a:off x="7419557" y="2638010"/>
+            <a:ext cx="4470399" cy="691693"/>
           </a:xfrm>
           <a:prstGeom prst="rect">
             <a:avLst/>
@@ -10013,10 +10024,10 @@
       </p:pic>
       <p:pic>
         <p:nvPicPr>
-          <p:cNvPr id="29" name="그림 28">
-            <a:extLst>
-              <a:ext uri="{FF2B5EF4-FFF2-40B4-BE49-F238E27FC236}">
-                <a16:creationId xmlns:a16="http://schemas.microsoft.com/office/drawing/2014/main" id="{F0A24E53-BC5F-406A-B389-C934D6A43912}"/>
+          <p:cNvPr id="32" name="그림 31">
+            <a:extLst>
+              <a:ext uri="{FF2B5EF4-FFF2-40B4-BE49-F238E27FC236}">
+                <a16:creationId xmlns:a16="http://schemas.microsoft.com/office/drawing/2014/main" id="{C9502D35-AD74-4DC1-A9D3-A38E8588E734}"/>
               </a:ext>
             </a:extLst>
           </p:cNvPr>
@@ -10039,8 +10050,8 @@
         </p:blipFill>
         <p:spPr>
           <a:xfrm>
-            <a:off x="7419557" y="2638010"/>
-            <a:ext cx="4470399" cy="691693"/>
+            <a:off x="7419556" y="4626987"/>
+            <a:ext cx="4470399" cy="689782"/>
           </a:xfrm>
           <a:prstGeom prst="rect">
             <a:avLst/>
@@ -10049,10 +10060,10 @@
       </p:pic>
       <p:pic>
         <p:nvPicPr>
-          <p:cNvPr id="32" name="그림 31">
-            <a:extLst>
-              <a:ext uri="{FF2B5EF4-FFF2-40B4-BE49-F238E27FC236}">
-                <a16:creationId xmlns:a16="http://schemas.microsoft.com/office/drawing/2014/main" id="{C9502D35-AD74-4DC1-A9D3-A38E8588E734}"/>
+          <p:cNvPr id="54" name="그림 53">
+            <a:extLst>
+              <a:ext uri="{FF2B5EF4-FFF2-40B4-BE49-F238E27FC236}">
+                <a16:creationId xmlns:a16="http://schemas.microsoft.com/office/drawing/2014/main" id="{E587D4D1-B5AD-4F84-A9EC-ACF0F37209F1}"/>
               </a:ext>
             </a:extLst>
           </p:cNvPr>
@@ -10075,20 +10086,23 @@
         </p:blipFill>
         <p:spPr>
           <a:xfrm>
-            <a:off x="7419556" y="4626987"/>
-            <a:ext cx="4470399" cy="689782"/>
-          </a:xfrm>
-          <a:prstGeom prst="rect">
-            <a:avLst/>
-          </a:prstGeom>
+            <a:off x="7583587" y="1388994"/>
+            <a:ext cx="2105544" cy="1106563"/>
+          </a:xfrm>
+          <a:prstGeom prst="rect">
+            <a:avLst/>
+          </a:prstGeom>
+          <a:solidFill>
+            <a:schemeClr val="bg1"/>
+          </a:solidFill>
         </p:spPr>
       </p:pic>
       <p:pic>
         <p:nvPicPr>
-          <p:cNvPr id="54" name="그림 53">
-            <a:extLst>
-              <a:ext uri="{FF2B5EF4-FFF2-40B4-BE49-F238E27FC236}">
-                <a16:creationId xmlns:a16="http://schemas.microsoft.com/office/drawing/2014/main" id="{E587D4D1-B5AD-4F84-A9EC-ACF0F37209F1}"/>
+          <p:cNvPr id="55" name="그림 54">
+            <a:extLst>
+              <a:ext uri="{FF2B5EF4-FFF2-40B4-BE49-F238E27FC236}">
+                <a16:creationId xmlns:a16="http://schemas.microsoft.com/office/drawing/2014/main" id="{92EB87C0-99F4-4D4D-BA7D-BBD8C5BA250D}"/>
               </a:ext>
             </a:extLst>
           </p:cNvPr>
@@ -10111,45 +10125,6 @@
         </p:blipFill>
         <p:spPr>
           <a:xfrm>
-            <a:off x="7583587" y="1388994"/>
-            <a:ext cx="2105544" cy="1106563"/>
-          </a:xfrm>
-          <a:prstGeom prst="rect">
-            <a:avLst/>
-          </a:prstGeom>
-          <a:solidFill>
-            <a:schemeClr val="bg1"/>
-          </a:solidFill>
-        </p:spPr>
-      </p:pic>
-      <p:pic>
-        <p:nvPicPr>
-          <p:cNvPr id="55" name="그림 54">
-            <a:extLst>
-              <a:ext uri="{FF2B5EF4-FFF2-40B4-BE49-F238E27FC236}">
-                <a16:creationId xmlns:a16="http://schemas.microsoft.com/office/drawing/2014/main" id="{92EB87C0-99F4-4D4D-BA7D-BBD8C5BA250D}"/>
-              </a:ext>
-            </a:extLst>
-          </p:cNvPr>
-          <p:cNvPicPr>
-            <a:picLocks noChangeAspect="1"/>
-          </p:cNvPicPr>
-          <p:nvPr/>
-        </p:nvPicPr>
-        <p:blipFill>
-          <a:blip r:embed="rId9">
-            <a:extLst>
-              <a:ext uri="{28A0092B-C50C-407E-A947-70E740481C1C}">
-                <a14:useLocalDpi xmlns:a14="http://schemas.microsoft.com/office/drawing/2010/main" val="0"/>
-              </a:ext>
-            </a:extLst>
-          </a:blip>
-          <a:stretch>
-            <a:fillRect/>
-          </a:stretch>
-        </p:blipFill>
-        <p:spPr>
-          <a:xfrm>
             <a:off x="7602753" y="3362087"/>
             <a:ext cx="2103138" cy="1094155"/>
           </a:xfrm>
@@ -10173,7 +10148,7 @@
           <p:nvPr/>
         </p:nvPicPr>
         <p:blipFill>
-          <a:blip r:embed="rId10">
+          <a:blip r:embed="rId9">
             <a:extLst>
               <a:ext uri="{28A0092B-C50C-407E-A947-70E740481C1C}">
                 <a14:useLocalDpi xmlns:a14="http://schemas.microsoft.com/office/drawing/2010/main" val="0"/>
@@ -10409,7 +10384,7 @@
           <p:nvPr>
             <p:extLst>
               <p:ext uri="{D42A27DB-BD31-4B8C-83A1-F6EECF244321}">
-                <p14:modId xmlns:p14="http://schemas.microsoft.com/office/powerpoint/2010/main" val="4141683252"/>
+                <p14:modId xmlns:p14="http://schemas.microsoft.com/office/powerpoint/2010/main" val="2641046476"/>
               </p:ext>
             </p:extLst>
           </p:nvPr>
@@ -10513,7 +10488,7 @@
                             <a:srgbClr val="FF0000"/>
                           </a:solidFill>
                         </a:rPr>
-                        <a:t>0.4113</a:t>
+                        <a:t>-1.5672</a:t>
                       </a:r>
                     </a:p>
                     <a:p>
@@ -10524,7 +10499,7 @@
                       </a:r>
                       <a:r>
                         <a:rPr lang="en-US" altLang="ko-KR" sz="1400" dirty="0"/>
-                        <a:t>0.0314</a:t>
+                        <a:t>0.1220</a:t>
                       </a:r>
                     </a:p>
                     <a:p>
@@ -10535,7 +10510,7 @@
                       </a:r>
                       <a:r>
                         <a:rPr lang="en-US" altLang="ko-KR" sz="1400" dirty="0"/>
-                        <a:t>0.1504</a:t>
+                        <a:t>0.2991</a:t>
                       </a:r>
                     </a:p>
                     <a:p>
@@ -10546,7 +10521,7 @@
                       </a:r>
                       <a:r>
                         <a:rPr lang="en-US" altLang="ko-KR" sz="1400" dirty="0"/>
-                        <a:t>0.1773</a:t>
+                        <a:t>0.3493</a:t>
                       </a:r>
                       <a:endParaRPr lang="pt-BR" altLang="ko-KR" sz="1400" dirty="0"/>
                     </a:p>
@@ -10776,6 +10751,42 @@
           </a:p>
         </p:txBody>
       </p:sp>
+      <p:pic>
+        <p:nvPicPr>
+          <p:cNvPr id="19" name="그림 18">
+            <a:extLst>
+              <a:ext uri="{FF2B5EF4-FFF2-40B4-BE49-F238E27FC236}">
+                <a16:creationId xmlns:a16="http://schemas.microsoft.com/office/drawing/2014/main" id="{C94D3121-19E1-4462-9F71-E74BD0D09B8D}"/>
+              </a:ext>
+            </a:extLst>
+          </p:cNvPr>
+          <p:cNvPicPr>
+            <a:picLocks noChangeAspect="1"/>
+          </p:cNvPicPr>
+          <p:nvPr/>
+        </p:nvPicPr>
+        <p:blipFill>
+          <a:blip r:embed="rId10">
+            <a:extLst>
+              <a:ext uri="{28A0092B-C50C-407E-A947-70E740481C1C}">
+                <a14:useLocalDpi xmlns:a14="http://schemas.microsoft.com/office/drawing/2010/main" val="0"/>
+              </a:ext>
+            </a:extLst>
+          </a:blip>
+          <a:stretch>
+            <a:fillRect/>
+          </a:stretch>
+        </p:blipFill>
+        <p:spPr>
+          <a:xfrm>
+            <a:off x="7419558" y="640550"/>
+            <a:ext cx="4470398" cy="676963"/>
+          </a:xfrm>
+          <a:prstGeom prst="rect">
+            <a:avLst/>
+          </a:prstGeom>
+        </p:spPr>
+      </p:pic>
     </p:spTree>
     <p:extLst>
       <p:ext uri="{BB962C8B-B14F-4D97-AF65-F5344CB8AC3E}">
@@ -13497,8 +13508,8 @@
         </p:blipFill>
         <p:spPr>
           <a:xfrm>
-            <a:off x="9758527" y="1390626"/>
-            <a:ext cx="2138738" cy="1131111"/>
+            <a:off x="9758527" y="1394234"/>
+            <a:ext cx="2138738" cy="1123894"/>
           </a:xfrm>
           <a:prstGeom prst="rect">
             <a:avLst/>
@@ -13672,10 +13683,10 @@
       </p:sp>
       <p:pic>
         <p:nvPicPr>
-          <p:cNvPr id="25" name="그림 24">
-            <a:extLst>
-              <a:ext uri="{FF2B5EF4-FFF2-40B4-BE49-F238E27FC236}">
-                <a16:creationId xmlns:a16="http://schemas.microsoft.com/office/drawing/2014/main" id="{A856132F-CBFF-4D9E-8989-4CB996C9FA0D}"/>
+          <p:cNvPr id="29" name="그림 28">
+            <a:extLst>
+              <a:ext uri="{FF2B5EF4-FFF2-40B4-BE49-F238E27FC236}">
+                <a16:creationId xmlns:a16="http://schemas.microsoft.com/office/drawing/2014/main" id="{F0A24E53-BC5F-406A-B389-C934D6A43912}"/>
               </a:ext>
             </a:extLst>
           </p:cNvPr>
@@ -13698,8 +13709,8 @@
         </p:blipFill>
         <p:spPr>
           <a:xfrm>
-            <a:off x="7466229" y="638495"/>
-            <a:ext cx="4431036" cy="681074"/>
+            <a:off x="7466229" y="2638010"/>
+            <a:ext cx="4437903" cy="691693"/>
           </a:xfrm>
           <a:prstGeom prst="rect">
             <a:avLst/>
@@ -13708,10 +13719,10 @@
       </p:pic>
       <p:pic>
         <p:nvPicPr>
-          <p:cNvPr id="29" name="그림 28">
-            <a:extLst>
-              <a:ext uri="{FF2B5EF4-FFF2-40B4-BE49-F238E27FC236}">
-                <a16:creationId xmlns:a16="http://schemas.microsoft.com/office/drawing/2014/main" id="{F0A24E53-BC5F-406A-B389-C934D6A43912}"/>
+          <p:cNvPr id="32" name="그림 31">
+            <a:extLst>
+              <a:ext uri="{FF2B5EF4-FFF2-40B4-BE49-F238E27FC236}">
+                <a16:creationId xmlns:a16="http://schemas.microsoft.com/office/drawing/2014/main" id="{C9502D35-AD74-4DC1-A9D3-A38E8588E734}"/>
               </a:ext>
             </a:extLst>
           </p:cNvPr>
@@ -13734,8 +13745,8 @@
         </p:blipFill>
         <p:spPr>
           <a:xfrm>
-            <a:off x="7466229" y="2638010"/>
-            <a:ext cx="4437903" cy="691693"/>
+            <a:off x="7473097" y="4648144"/>
+            <a:ext cx="4431036" cy="689782"/>
           </a:xfrm>
           <a:prstGeom prst="rect">
             <a:avLst/>
@@ -13744,10 +13755,10 @@
       </p:pic>
       <p:pic>
         <p:nvPicPr>
-          <p:cNvPr id="32" name="그림 31">
-            <a:extLst>
-              <a:ext uri="{FF2B5EF4-FFF2-40B4-BE49-F238E27FC236}">
-                <a16:creationId xmlns:a16="http://schemas.microsoft.com/office/drawing/2014/main" id="{C9502D35-AD74-4DC1-A9D3-A38E8588E734}"/>
+          <p:cNvPr id="54" name="그림 53">
+            <a:extLst>
+              <a:ext uri="{FF2B5EF4-FFF2-40B4-BE49-F238E27FC236}">
+                <a16:creationId xmlns:a16="http://schemas.microsoft.com/office/drawing/2014/main" id="{E587D4D1-B5AD-4F84-A9EC-ACF0F37209F1}"/>
               </a:ext>
             </a:extLst>
           </p:cNvPr>
@@ -13770,20 +13781,23 @@
         </p:blipFill>
         <p:spPr>
           <a:xfrm>
-            <a:off x="7473097" y="4648144"/>
-            <a:ext cx="4431036" cy="689782"/>
-          </a:xfrm>
-          <a:prstGeom prst="rect">
-            <a:avLst/>
-          </a:prstGeom>
+            <a:off x="7583587" y="1395140"/>
+            <a:ext cx="2105544" cy="1094271"/>
+          </a:xfrm>
+          <a:prstGeom prst="rect">
+            <a:avLst/>
+          </a:prstGeom>
+          <a:solidFill>
+            <a:schemeClr val="bg1"/>
+          </a:solidFill>
         </p:spPr>
       </p:pic>
       <p:pic>
         <p:nvPicPr>
-          <p:cNvPr id="54" name="그림 53">
-            <a:extLst>
-              <a:ext uri="{FF2B5EF4-FFF2-40B4-BE49-F238E27FC236}">
-                <a16:creationId xmlns:a16="http://schemas.microsoft.com/office/drawing/2014/main" id="{E587D4D1-B5AD-4F84-A9EC-ACF0F37209F1}"/>
+          <p:cNvPr id="55" name="그림 54">
+            <a:extLst>
+              <a:ext uri="{FF2B5EF4-FFF2-40B4-BE49-F238E27FC236}">
+                <a16:creationId xmlns:a16="http://schemas.microsoft.com/office/drawing/2014/main" id="{92EB87C0-99F4-4D4D-BA7D-BBD8C5BA250D}"/>
               </a:ext>
             </a:extLst>
           </p:cNvPr>
@@ -13806,45 +13820,6 @@
         </p:blipFill>
         <p:spPr>
           <a:xfrm>
-            <a:off x="7583587" y="1395140"/>
-            <a:ext cx="2105544" cy="1094271"/>
-          </a:xfrm>
-          <a:prstGeom prst="rect">
-            <a:avLst/>
-          </a:prstGeom>
-          <a:solidFill>
-            <a:schemeClr val="bg1"/>
-          </a:solidFill>
-        </p:spPr>
-      </p:pic>
-      <p:pic>
-        <p:nvPicPr>
-          <p:cNvPr id="55" name="그림 54">
-            <a:extLst>
-              <a:ext uri="{FF2B5EF4-FFF2-40B4-BE49-F238E27FC236}">
-                <a16:creationId xmlns:a16="http://schemas.microsoft.com/office/drawing/2014/main" id="{92EB87C0-99F4-4D4D-BA7D-BBD8C5BA250D}"/>
-              </a:ext>
-            </a:extLst>
-          </p:cNvPr>
-          <p:cNvPicPr>
-            <a:picLocks noChangeAspect="1"/>
-          </p:cNvPicPr>
-          <p:nvPr/>
-        </p:nvPicPr>
-        <p:blipFill>
-          <a:blip r:embed="rId9">
-            <a:extLst>
-              <a:ext uri="{28A0092B-C50C-407E-A947-70E740481C1C}">
-                <a14:useLocalDpi xmlns:a14="http://schemas.microsoft.com/office/drawing/2010/main" val="0"/>
-              </a:ext>
-            </a:extLst>
-          </a:blip>
-          <a:stretch>
-            <a:fillRect/>
-          </a:stretch>
-        </p:blipFill>
-        <p:spPr>
-          <a:xfrm>
             <a:off x="7602753" y="3365927"/>
             <a:ext cx="2103138" cy="1086475"/>
           </a:xfrm>
@@ -13868,7 +13843,7 @@
           <p:nvPr/>
         </p:nvPicPr>
         <p:blipFill>
-          <a:blip r:embed="rId10">
+          <a:blip r:embed="rId9">
             <a:extLst>
               <a:ext uri="{28A0092B-C50C-407E-A947-70E740481C1C}">
                 <a14:useLocalDpi xmlns:a14="http://schemas.microsoft.com/office/drawing/2010/main" val="0"/>
@@ -14039,7 +14014,11 @@
             <a:graphicFrameLocks noGrp="1"/>
           </p:cNvGraphicFramePr>
           <p:nvPr>
-            <p:extLst/>
+            <p:extLst>
+              <p:ext uri="{D42A27DB-BD31-4B8C-83A1-F6EECF244321}">
+                <p14:modId xmlns:p14="http://schemas.microsoft.com/office/powerpoint/2010/main" val="1162714949"/>
+              </p:ext>
+            </p:extLst>
           </p:nvPr>
         </p:nvGraphicFramePr>
         <p:xfrm>
@@ -14141,7 +14120,7 @@
                             <a:srgbClr val="FF0000"/>
                           </a:solidFill>
                         </a:rPr>
-                        <a:t>-0.0236</a:t>
+                        <a:t>0.7308</a:t>
                       </a:r>
                     </a:p>
                     <a:p>
@@ -14152,7 +14131,7 @@
                       </a:r>
                       <a:r>
                         <a:rPr lang="en-US" altLang="ko-KR" sz="1400" dirty="0"/>
-                        <a:t>0.0953</a:t>
+                        <a:t>0.0217</a:t>
                       </a:r>
                     </a:p>
                     <a:p>
@@ -14163,7 +14142,7 @@
                       </a:r>
                       <a:r>
                         <a:rPr lang="en-US" altLang="ko-KR" sz="1400" dirty="0"/>
-                        <a:t>0.2271</a:t>
+                        <a:t>0.0962</a:t>
                       </a:r>
                     </a:p>
                     <a:p>
@@ -14174,7 +14153,7 @@
                       </a:r>
                       <a:r>
                         <a:rPr lang="en-US" altLang="ko-KR" sz="1400" dirty="0"/>
-                        <a:t>0.3088</a:t>
+                        <a:t>0.1475</a:t>
                       </a:r>
                       <a:endParaRPr lang="pt-BR" altLang="ko-KR" sz="1400" dirty="0"/>
                     </a:p>
@@ -14412,6 +14391,42 @@
           </a:p>
         </p:txBody>
       </p:sp>
+      <p:pic>
+        <p:nvPicPr>
+          <p:cNvPr id="21" name="그림 20">
+            <a:extLst>
+              <a:ext uri="{FF2B5EF4-FFF2-40B4-BE49-F238E27FC236}">
+                <a16:creationId xmlns:a16="http://schemas.microsoft.com/office/drawing/2014/main" id="{74D8BDC0-5588-4308-87D1-02549FBC55EE}"/>
+              </a:ext>
+            </a:extLst>
+          </p:cNvPr>
+          <p:cNvPicPr>
+            <a:picLocks noChangeAspect="1"/>
+          </p:cNvPicPr>
+          <p:nvPr/>
+        </p:nvPicPr>
+        <p:blipFill>
+          <a:blip r:embed="rId10">
+            <a:extLst>
+              <a:ext uri="{28A0092B-C50C-407E-A947-70E740481C1C}">
+                <a14:useLocalDpi xmlns:a14="http://schemas.microsoft.com/office/drawing/2010/main" val="0"/>
+              </a:ext>
+            </a:extLst>
+          </a:blip>
+          <a:stretch>
+            <a:fillRect/>
+          </a:stretch>
+        </p:blipFill>
+        <p:spPr>
+          <a:xfrm>
+            <a:off x="7466229" y="641227"/>
+            <a:ext cx="4431036" cy="675611"/>
+          </a:xfrm>
+          <a:prstGeom prst="rect">
+            <a:avLst/>
+          </a:prstGeom>
+        </p:spPr>
+      </p:pic>
     </p:spTree>
     <p:extLst>
       <p:ext uri="{BB962C8B-B14F-4D97-AF65-F5344CB8AC3E}">
@@ -15504,8 +15519,8 @@
         </p:blipFill>
         <p:spPr>
           <a:xfrm>
-            <a:off x="9758527" y="1397573"/>
-            <a:ext cx="2138738" cy="1117217"/>
+            <a:off x="9758527" y="1399218"/>
+            <a:ext cx="2138738" cy="1113926"/>
           </a:xfrm>
           <a:prstGeom prst="rect">
             <a:avLst/>
@@ -15679,10 +15694,10 @@
       </p:sp>
       <p:pic>
         <p:nvPicPr>
-          <p:cNvPr id="25" name="그림 24">
-            <a:extLst>
-              <a:ext uri="{FF2B5EF4-FFF2-40B4-BE49-F238E27FC236}">
-                <a16:creationId xmlns:a16="http://schemas.microsoft.com/office/drawing/2014/main" id="{A856132F-CBFF-4D9E-8989-4CB996C9FA0D}"/>
+          <p:cNvPr id="29" name="그림 28">
+            <a:extLst>
+              <a:ext uri="{FF2B5EF4-FFF2-40B4-BE49-F238E27FC236}">
+                <a16:creationId xmlns:a16="http://schemas.microsoft.com/office/drawing/2014/main" id="{F0A24E53-BC5F-406A-B389-C934D6A43912}"/>
               </a:ext>
             </a:extLst>
           </p:cNvPr>
@@ -15705,8 +15720,8 @@
         </p:blipFill>
         <p:spPr>
           <a:xfrm>
-            <a:off x="7419558" y="638495"/>
-            <a:ext cx="4470398" cy="681074"/>
+            <a:off x="7419557" y="2638010"/>
+            <a:ext cx="4470399" cy="691693"/>
           </a:xfrm>
           <a:prstGeom prst="rect">
             <a:avLst/>
@@ -15715,10 +15730,10 @@
       </p:pic>
       <p:pic>
         <p:nvPicPr>
-          <p:cNvPr id="29" name="그림 28">
-            <a:extLst>
-              <a:ext uri="{FF2B5EF4-FFF2-40B4-BE49-F238E27FC236}">
-                <a16:creationId xmlns:a16="http://schemas.microsoft.com/office/drawing/2014/main" id="{F0A24E53-BC5F-406A-B389-C934D6A43912}"/>
+          <p:cNvPr id="32" name="그림 31">
+            <a:extLst>
+              <a:ext uri="{FF2B5EF4-FFF2-40B4-BE49-F238E27FC236}">
+                <a16:creationId xmlns:a16="http://schemas.microsoft.com/office/drawing/2014/main" id="{C9502D35-AD74-4DC1-A9D3-A38E8588E734}"/>
               </a:ext>
             </a:extLst>
           </p:cNvPr>
@@ -15741,8 +15756,8 @@
         </p:blipFill>
         <p:spPr>
           <a:xfrm>
-            <a:off x="7419557" y="2638010"/>
-            <a:ext cx="4470399" cy="691693"/>
+            <a:off x="7419556" y="4626987"/>
+            <a:ext cx="4470399" cy="689782"/>
           </a:xfrm>
           <a:prstGeom prst="rect">
             <a:avLst/>
@@ -15751,10 +15766,10 @@
       </p:pic>
       <p:pic>
         <p:nvPicPr>
-          <p:cNvPr id="32" name="그림 31">
-            <a:extLst>
-              <a:ext uri="{FF2B5EF4-FFF2-40B4-BE49-F238E27FC236}">
-                <a16:creationId xmlns:a16="http://schemas.microsoft.com/office/drawing/2014/main" id="{C9502D35-AD74-4DC1-A9D3-A38E8588E734}"/>
+          <p:cNvPr id="54" name="그림 53">
+            <a:extLst>
+              <a:ext uri="{FF2B5EF4-FFF2-40B4-BE49-F238E27FC236}">
+                <a16:creationId xmlns:a16="http://schemas.microsoft.com/office/drawing/2014/main" id="{E587D4D1-B5AD-4F84-A9EC-ACF0F37209F1}"/>
               </a:ext>
             </a:extLst>
           </p:cNvPr>
@@ -15777,20 +15792,23 @@
         </p:blipFill>
         <p:spPr>
           <a:xfrm>
-            <a:off x="7419556" y="4626987"/>
-            <a:ext cx="4470399" cy="689782"/>
-          </a:xfrm>
-          <a:prstGeom prst="rect">
-            <a:avLst/>
-          </a:prstGeom>
+            <a:off x="7583587" y="1388994"/>
+            <a:ext cx="2105544" cy="1106563"/>
+          </a:xfrm>
+          <a:prstGeom prst="rect">
+            <a:avLst/>
+          </a:prstGeom>
+          <a:solidFill>
+            <a:schemeClr val="bg1"/>
+          </a:solidFill>
         </p:spPr>
       </p:pic>
       <p:pic>
         <p:nvPicPr>
-          <p:cNvPr id="54" name="그림 53">
-            <a:extLst>
-              <a:ext uri="{FF2B5EF4-FFF2-40B4-BE49-F238E27FC236}">
-                <a16:creationId xmlns:a16="http://schemas.microsoft.com/office/drawing/2014/main" id="{E587D4D1-B5AD-4F84-A9EC-ACF0F37209F1}"/>
+          <p:cNvPr id="55" name="그림 54">
+            <a:extLst>
+              <a:ext uri="{FF2B5EF4-FFF2-40B4-BE49-F238E27FC236}">
+                <a16:creationId xmlns:a16="http://schemas.microsoft.com/office/drawing/2014/main" id="{92EB87C0-99F4-4D4D-BA7D-BBD8C5BA250D}"/>
               </a:ext>
             </a:extLst>
           </p:cNvPr>
@@ -15813,45 +15831,6 @@
         </p:blipFill>
         <p:spPr>
           <a:xfrm>
-            <a:off x="7583587" y="1388994"/>
-            <a:ext cx="2105544" cy="1106563"/>
-          </a:xfrm>
-          <a:prstGeom prst="rect">
-            <a:avLst/>
-          </a:prstGeom>
-          <a:solidFill>
-            <a:schemeClr val="bg1"/>
-          </a:solidFill>
-        </p:spPr>
-      </p:pic>
-      <p:pic>
-        <p:nvPicPr>
-          <p:cNvPr id="55" name="그림 54">
-            <a:extLst>
-              <a:ext uri="{FF2B5EF4-FFF2-40B4-BE49-F238E27FC236}">
-                <a16:creationId xmlns:a16="http://schemas.microsoft.com/office/drawing/2014/main" id="{92EB87C0-99F4-4D4D-BA7D-BBD8C5BA250D}"/>
-              </a:ext>
-            </a:extLst>
-          </p:cNvPr>
-          <p:cNvPicPr>
-            <a:picLocks noChangeAspect="1"/>
-          </p:cNvPicPr>
-          <p:nvPr/>
-        </p:nvPicPr>
-        <p:blipFill>
-          <a:blip r:embed="rId9">
-            <a:extLst>
-              <a:ext uri="{28A0092B-C50C-407E-A947-70E740481C1C}">
-                <a14:useLocalDpi xmlns:a14="http://schemas.microsoft.com/office/drawing/2010/main" val="0"/>
-              </a:ext>
-            </a:extLst>
-          </a:blip>
-          <a:stretch>
-            <a:fillRect/>
-          </a:stretch>
-        </p:blipFill>
-        <p:spPr>
-          <a:xfrm>
             <a:off x="7602753" y="3362087"/>
             <a:ext cx="2103138" cy="1094155"/>
           </a:xfrm>
@@ -15875,7 +15854,7 @@
           <p:nvPr/>
         </p:nvPicPr>
         <p:blipFill>
-          <a:blip r:embed="rId10">
+          <a:blip r:embed="rId9">
             <a:extLst>
               <a:ext uri="{28A0092B-C50C-407E-A947-70E740481C1C}">
                 <a14:useLocalDpi xmlns:a14="http://schemas.microsoft.com/office/drawing/2010/main" val="0"/>
@@ -16045,7 +16024,7 @@
           <p:nvPr>
             <p:extLst>
               <p:ext uri="{D42A27DB-BD31-4B8C-83A1-F6EECF244321}">
-                <p14:modId xmlns:p14="http://schemas.microsoft.com/office/powerpoint/2010/main" val="3781564950"/>
+                <p14:modId xmlns:p14="http://schemas.microsoft.com/office/powerpoint/2010/main" val="3527165304"/>
               </p:ext>
             </p:extLst>
           </p:nvPr>
@@ -16149,7 +16128,7 @@
                             <a:srgbClr val="FF0000"/>
                           </a:solidFill>
                         </a:rPr>
-                        <a:t>-2.5735</a:t>
+                        <a:t>0.6794</a:t>
                       </a:r>
                     </a:p>
                     <a:p>
@@ -16160,7 +16139,7 @@
                       </a:r>
                       <a:r>
                         <a:rPr lang="en-US" altLang="ko-KR" sz="1400" dirty="0"/>
-                        <a:t>0.1908</a:t>
+                        <a:t>0.0152</a:t>
                       </a:r>
                     </a:p>
                     <a:p>
@@ -16171,7 +16150,7 @@
                       </a:r>
                       <a:r>
                         <a:rPr lang="en-US" altLang="ko-KR" sz="1400" dirty="0"/>
-                        <a:t>0.3305</a:t>
+                        <a:t>0.0860</a:t>
                       </a:r>
                     </a:p>
                     <a:p>
@@ -16182,7 +16161,7 @@
                       </a:r>
                       <a:r>
                         <a:rPr lang="en-US" altLang="ko-KR" sz="1400" dirty="0"/>
-                        <a:t>0.4368</a:t>
+                        <a:t>0.1234</a:t>
                       </a:r>
                       <a:endParaRPr lang="pt-BR" altLang="ko-KR" sz="1400" dirty="0"/>
                     </a:p>
@@ -16404,6 +16383,42 @@
           </a:p>
         </p:txBody>
       </p:sp>
+      <p:pic>
+        <p:nvPicPr>
+          <p:cNvPr id="21" name="그림 20">
+            <a:extLst>
+              <a:ext uri="{FF2B5EF4-FFF2-40B4-BE49-F238E27FC236}">
+                <a16:creationId xmlns:a16="http://schemas.microsoft.com/office/drawing/2014/main" id="{9EF58D91-5FB6-4123-B470-67D506F04BE8}"/>
+              </a:ext>
+            </a:extLst>
+          </p:cNvPr>
+          <p:cNvPicPr>
+            <a:picLocks noChangeAspect="1"/>
+          </p:cNvPicPr>
+          <p:nvPr/>
+        </p:nvPicPr>
+        <p:blipFill>
+          <a:blip r:embed="rId10">
+            <a:extLst>
+              <a:ext uri="{28A0092B-C50C-407E-A947-70E740481C1C}">
+                <a14:useLocalDpi xmlns:a14="http://schemas.microsoft.com/office/drawing/2010/main" val="0"/>
+              </a:ext>
+            </a:extLst>
+          </a:blip>
+          <a:stretch>
+            <a:fillRect/>
+          </a:stretch>
+        </p:blipFill>
+        <p:spPr>
+          <a:xfrm>
+            <a:off x="7419558" y="640550"/>
+            <a:ext cx="4470398" cy="676963"/>
+          </a:xfrm>
+          <a:prstGeom prst="rect">
+            <a:avLst/>
+          </a:prstGeom>
+        </p:spPr>
+      </p:pic>
     </p:spTree>
     <p:extLst>
       <p:ext uri="{BB962C8B-B14F-4D97-AF65-F5344CB8AC3E}">
@@ -17499,8 +17514,8 @@
         </p:blipFill>
         <p:spPr>
           <a:xfrm>
-            <a:off x="9758527" y="1399264"/>
-            <a:ext cx="2138738" cy="1113833"/>
+            <a:off x="9768100" y="1399264"/>
+            <a:ext cx="2119591" cy="1113833"/>
           </a:xfrm>
           <a:prstGeom prst="rect">
             <a:avLst/>
@@ -17623,10 +17638,10 @@
       </p:sp>
       <p:pic>
         <p:nvPicPr>
-          <p:cNvPr id="25" name="그림 24">
-            <a:extLst>
-              <a:ext uri="{FF2B5EF4-FFF2-40B4-BE49-F238E27FC236}">
-                <a16:creationId xmlns:a16="http://schemas.microsoft.com/office/drawing/2014/main" id="{A856132F-CBFF-4D9E-8989-4CB996C9FA0D}"/>
+          <p:cNvPr id="29" name="그림 28">
+            <a:extLst>
+              <a:ext uri="{FF2B5EF4-FFF2-40B4-BE49-F238E27FC236}">
+                <a16:creationId xmlns:a16="http://schemas.microsoft.com/office/drawing/2014/main" id="{F0A24E53-BC5F-406A-B389-C934D6A43912}"/>
               </a:ext>
             </a:extLst>
           </p:cNvPr>
@@ -17649,42 +17664,6 @@
         </p:blipFill>
         <p:spPr>
           <a:xfrm>
-            <a:off x="7466230" y="638495"/>
-            <a:ext cx="4431035" cy="681074"/>
-          </a:xfrm>
-          <a:prstGeom prst="rect">
-            <a:avLst/>
-          </a:prstGeom>
-        </p:spPr>
-      </p:pic>
-      <p:pic>
-        <p:nvPicPr>
-          <p:cNvPr id="29" name="그림 28">
-            <a:extLst>
-              <a:ext uri="{FF2B5EF4-FFF2-40B4-BE49-F238E27FC236}">
-                <a16:creationId xmlns:a16="http://schemas.microsoft.com/office/drawing/2014/main" id="{F0A24E53-BC5F-406A-B389-C934D6A43912}"/>
-              </a:ext>
-            </a:extLst>
-          </p:cNvPr>
-          <p:cNvPicPr>
-            <a:picLocks noChangeAspect="1"/>
-          </p:cNvPicPr>
-          <p:nvPr/>
-        </p:nvPicPr>
-        <p:blipFill>
-          <a:blip r:embed="rId6">
-            <a:extLst>
-              <a:ext uri="{28A0092B-C50C-407E-A947-70E740481C1C}">
-                <a14:useLocalDpi xmlns:a14="http://schemas.microsoft.com/office/drawing/2010/main" val="0"/>
-              </a:ext>
-            </a:extLst>
-          </a:blip>
-          <a:stretch>
-            <a:fillRect/>
-          </a:stretch>
-        </p:blipFill>
-        <p:spPr>
-          <a:xfrm>
             <a:off x="7466230" y="2638010"/>
             <a:ext cx="4431036" cy="691693"/>
           </a:xfrm>
@@ -17708,7 +17687,7 @@
           <p:nvPr/>
         </p:nvPicPr>
         <p:blipFill>
-          <a:blip r:embed="rId7">
+          <a:blip r:embed="rId6">
             <a:extLst>
               <a:ext uri="{28A0092B-C50C-407E-A947-70E740481C1C}">
                 <a14:useLocalDpi xmlns:a14="http://schemas.microsoft.com/office/drawing/2010/main" val="0"/>
@@ -17947,7 +17926,7 @@
           <p:nvPr>
             <p:extLst>
               <p:ext uri="{D42A27DB-BD31-4B8C-83A1-F6EECF244321}">
-                <p14:modId xmlns:p14="http://schemas.microsoft.com/office/powerpoint/2010/main" val="835693279"/>
+                <p14:modId xmlns:p14="http://schemas.microsoft.com/office/powerpoint/2010/main" val="3988529637"/>
               </p:ext>
             </p:extLst>
           </p:nvPr>
@@ -18051,7 +18030,7 @@
                             <a:srgbClr val="FF0000"/>
                           </a:solidFill>
                         </a:rPr>
-                        <a:t>-0.0611</a:t>
+                        <a:t>0.7783</a:t>
                       </a:r>
                     </a:p>
                     <a:p>
@@ -18062,7 +18041,7 @@
                       </a:r>
                       <a:r>
                         <a:rPr lang="en-US" altLang="ko-KR" sz="1400" dirty="0"/>
-                        <a:t>0.0988</a:t>
+                        <a:t>0.0179</a:t>
                       </a:r>
                     </a:p>
                     <a:p>
@@ -18073,7 +18052,7 @@
                       </a:r>
                       <a:r>
                         <a:rPr lang="en-US" altLang="ko-KR" sz="1400" dirty="0"/>
-                        <a:t>0.2236</a:t>
+                        <a:t>0.0909</a:t>
                       </a:r>
                     </a:p>
                     <a:p>
@@ -18084,7 +18063,7 @@
                       </a:r>
                       <a:r>
                         <a:rPr lang="en-US" altLang="ko-KR" sz="1400" dirty="0"/>
-                        <a:t>0.3144</a:t>
+                        <a:t>0.1339</a:t>
                       </a:r>
                       <a:endParaRPr lang="pt-BR" altLang="ko-KR" sz="1400" dirty="0"/>
                     </a:p>
@@ -18337,7 +18316,7 @@
           <p:nvPr/>
         </p:nvPicPr>
         <p:blipFill>
-          <a:blip r:embed="rId8">
+          <a:blip r:embed="rId7">
             <a:extLst>
               <a:ext uri="{28A0092B-C50C-407E-A947-70E740481C1C}">
                 <a14:useLocalDpi xmlns:a14="http://schemas.microsoft.com/office/drawing/2010/main" val="0"/>
@@ -18376,7 +18355,7 @@
           <p:nvPr/>
         </p:nvPicPr>
         <p:blipFill>
-          <a:blip r:embed="rId9">
+          <a:blip r:embed="rId8">
             <a:extLst>
               <a:ext uri="{28A0092B-C50C-407E-A947-70E740481C1C}">
                 <a14:useLocalDpi xmlns:a14="http://schemas.microsoft.com/office/drawing/2010/main" val="0"/>
@@ -18412,7 +18391,7 @@
           <p:nvPr/>
         </p:nvPicPr>
         <p:blipFill>
-          <a:blip r:embed="rId10">
+          <a:blip r:embed="rId9">
             <a:extLst>
               <a:ext uri="{28A0092B-C50C-407E-A947-70E740481C1C}">
                 <a14:useLocalDpi xmlns:a14="http://schemas.microsoft.com/office/drawing/2010/main" val="0"/>
@@ -18427,6 +18406,42 @@
           <a:xfrm>
             <a:off x="7608987" y="5414932"/>
             <a:ext cx="2105029" cy="1094003"/>
+          </a:xfrm>
+          <a:prstGeom prst="rect">
+            <a:avLst/>
+          </a:prstGeom>
+        </p:spPr>
+      </p:pic>
+      <p:pic>
+        <p:nvPicPr>
+          <p:cNvPr id="19" name="그림 18">
+            <a:extLst>
+              <a:ext uri="{FF2B5EF4-FFF2-40B4-BE49-F238E27FC236}">
+                <a16:creationId xmlns:a16="http://schemas.microsoft.com/office/drawing/2014/main" id="{38EE907E-048D-4E71-812A-29917487A2D6}"/>
+              </a:ext>
+            </a:extLst>
+          </p:cNvPr>
+          <p:cNvPicPr>
+            <a:picLocks noChangeAspect="1"/>
+          </p:cNvPicPr>
+          <p:nvPr/>
+        </p:nvPicPr>
+        <p:blipFill>
+          <a:blip r:embed="rId10">
+            <a:extLst>
+              <a:ext uri="{28A0092B-C50C-407E-A947-70E740481C1C}">
+                <a14:useLocalDpi xmlns:a14="http://schemas.microsoft.com/office/drawing/2010/main" val="0"/>
+              </a:ext>
+            </a:extLst>
+          </a:blip>
+          <a:stretch>
+            <a:fillRect/>
+          </a:stretch>
+        </p:blipFill>
+        <p:spPr>
+          <a:xfrm>
+            <a:off x="7466229" y="641227"/>
+            <a:ext cx="4431036" cy="675611"/>
           </a:xfrm>
           <a:prstGeom prst="rect">
             <a:avLst/>
@@ -19533,8 +19548,8 @@
         </p:blipFill>
         <p:spPr>
           <a:xfrm>
-            <a:off x="9770707" y="1395920"/>
-            <a:ext cx="2114377" cy="1120523"/>
+            <a:off x="9770707" y="1404461"/>
+            <a:ext cx="2114377" cy="1103440"/>
           </a:xfrm>
           <a:prstGeom prst="rect">
             <a:avLst/>
@@ -19657,10 +19672,10 @@
       </p:sp>
       <p:pic>
         <p:nvPicPr>
-          <p:cNvPr id="25" name="그림 24">
-            <a:extLst>
-              <a:ext uri="{FF2B5EF4-FFF2-40B4-BE49-F238E27FC236}">
-                <a16:creationId xmlns:a16="http://schemas.microsoft.com/office/drawing/2014/main" id="{A856132F-CBFF-4D9E-8989-4CB996C9FA0D}"/>
+          <p:cNvPr id="29" name="그림 28">
+            <a:extLst>
+              <a:ext uri="{FF2B5EF4-FFF2-40B4-BE49-F238E27FC236}">
+                <a16:creationId xmlns:a16="http://schemas.microsoft.com/office/drawing/2014/main" id="{F0A24E53-BC5F-406A-B389-C934D6A43912}"/>
               </a:ext>
             </a:extLst>
           </p:cNvPr>
@@ -19683,8 +19698,8 @@
         </p:blipFill>
         <p:spPr>
           <a:xfrm>
-            <a:off x="7419557" y="638495"/>
-            <a:ext cx="4453671" cy="681074"/>
+            <a:off x="7419557" y="2638010"/>
+            <a:ext cx="4453671" cy="691693"/>
           </a:xfrm>
           <a:prstGeom prst="rect">
             <a:avLst/>
@@ -19693,10 +19708,10 @@
       </p:pic>
       <p:pic>
         <p:nvPicPr>
-          <p:cNvPr id="29" name="그림 28">
-            <a:extLst>
-              <a:ext uri="{FF2B5EF4-FFF2-40B4-BE49-F238E27FC236}">
-                <a16:creationId xmlns:a16="http://schemas.microsoft.com/office/drawing/2014/main" id="{F0A24E53-BC5F-406A-B389-C934D6A43912}"/>
+          <p:cNvPr id="32" name="그림 31">
+            <a:extLst>
+              <a:ext uri="{FF2B5EF4-FFF2-40B4-BE49-F238E27FC236}">
+                <a16:creationId xmlns:a16="http://schemas.microsoft.com/office/drawing/2014/main" id="{C9502D35-AD74-4DC1-A9D3-A38E8588E734}"/>
               </a:ext>
             </a:extLst>
           </p:cNvPr>
@@ -19719,8 +19734,8 @@
         </p:blipFill>
         <p:spPr>
           <a:xfrm>
-            <a:off x="7419557" y="2638010"/>
-            <a:ext cx="4453671" cy="691693"/>
+            <a:off x="7419557" y="4626987"/>
+            <a:ext cx="4453672" cy="689782"/>
           </a:xfrm>
           <a:prstGeom prst="rect">
             <a:avLst/>
@@ -19729,10 +19744,10 @@
       </p:pic>
       <p:pic>
         <p:nvPicPr>
-          <p:cNvPr id="32" name="그림 31">
-            <a:extLst>
-              <a:ext uri="{FF2B5EF4-FFF2-40B4-BE49-F238E27FC236}">
-                <a16:creationId xmlns:a16="http://schemas.microsoft.com/office/drawing/2014/main" id="{C9502D35-AD74-4DC1-A9D3-A38E8588E734}"/>
+          <p:cNvPr id="54" name="그림 53">
+            <a:extLst>
+              <a:ext uri="{FF2B5EF4-FFF2-40B4-BE49-F238E27FC236}">
+                <a16:creationId xmlns:a16="http://schemas.microsoft.com/office/drawing/2014/main" id="{E587D4D1-B5AD-4F84-A9EC-ACF0F37209F1}"/>
               </a:ext>
             </a:extLst>
           </p:cNvPr>
@@ -19755,20 +19770,23 @@
         </p:blipFill>
         <p:spPr>
           <a:xfrm>
-            <a:off x="7419557" y="4626987"/>
-            <a:ext cx="4453672" cy="689782"/>
-          </a:xfrm>
-          <a:prstGeom prst="rect">
-            <a:avLst/>
-          </a:prstGeom>
+            <a:off x="7583587" y="1388070"/>
+            <a:ext cx="2105544" cy="1108411"/>
+          </a:xfrm>
+          <a:prstGeom prst="rect">
+            <a:avLst/>
+          </a:prstGeom>
+          <a:solidFill>
+            <a:schemeClr val="bg1"/>
+          </a:solidFill>
         </p:spPr>
       </p:pic>
       <p:pic>
         <p:nvPicPr>
-          <p:cNvPr id="54" name="그림 53">
-            <a:extLst>
-              <a:ext uri="{FF2B5EF4-FFF2-40B4-BE49-F238E27FC236}">
-                <a16:creationId xmlns:a16="http://schemas.microsoft.com/office/drawing/2014/main" id="{E587D4D1-B5AD-4F84-A9EC-ACF0F37209F1}"/>
+          <p:cNvPr id="55" name="그림 54">
+            <a:extLst>
+              <a:ext uri="{FF2B5EF4-FFF2-40B4-BE49-F238E27FC236}">
+                <a16:creationId xmlns:a16="http://schemas.microsoft.com/office/drawing/2014/main" id="{92EB87C0-99F4-4D4D-BA7D-BBD8C5BA250D}"/>
               </a:ext>
             </a:extLst>
           </p:cNvPr>
@@ -19791,45 +19809,6 @@
         </p:blipFill>
         <p:spPr>
           <a:xfrm>
-            <a:off x="7583587" y="1388070"/>
-            <a:ext cx="2105544" cy="1108411"/>
-          </a:xfrm>
-          <a:prstGeom prst="rect">
-            <a:avLst/>
-          </a:prstGeom>
-          <a:solidFill>
-            <a:schemeClr val="bg1"/>
-          </a:solidFill>
-        </p:spPr>
-      </p:pic>
-      <p:pic>
-        <p:nvPicPr>
-          <p:cNvPr id="55" name="그림 54">
-            <a:extLst>
-              <a:ext uri="{FF2B5EF4-FFF2-40B4-BE49-F238E27FC236}">
-                <a16:creationId xmlns:a16="http://schemas.microsoft.com/office/drawing/2014/main" id="{92EB87C0-99F4-4D4D-BA7D-BBD8C5BA250D}"/>
-              </a:ext>
-            </a:extLst>
-          </p:cNvPr>
-          <p:cNvPicPr>
-            <a:picLocks noChangeAspect="1"/>
-          </p:cNvPicPr>
-          <p:nvPr/>
-        </p:nvPicPr>
-        <p:blipFill>
-          <a:blip r:embed="rId9">
-            <a:extLst>
-              <a:ext uri="{28A0092B-C50C-407E-A947-70E740481C1C}">
-                <a14:useLocalDpi xmlns:a14="http://schemas.microsoft.com/office/drawing/2010/main" val="0"/>
-              </a:ext>
-            </a:extLst>
-          </a:blip>
-          <a:stretch>
-            <a:fillRect/>
-          </a:stretch>
-        </p:blipFill>
-        <p:spPr>
-          <a:xfrm>
             <a:off x="7602753" y="3354959"/>
             <a:ext cx="2103138" cy="1108411"/>
           </a:xfrm>
@@ -19853,7 +19832,7 @@
           <p:nvPr/>
         </p:nvPicPr>
         <p:blipFill>
-          <a:blip r:embed="rId10">
+          <a:blip r:embed="rId9">
             <a:extLst>
               <a:ext uri="{28A0092B-C50C-407E-A947-70E740481C1C}">
                 <a14:useLocalDpi xmlns:a14="http://schemas.microsoft.com/office/drawing/2010/main" val="0"/>
@@ -20086,7 +20065,7 @@
           <p:nvPr>
             <p:extLst>
               <p:ext uri="{D42A27DB-BD31-4B8C-83A1-F6EECF244321}">
-                <p14:modId xmlns:p14="http://schemas.microsoft.com/office/powerpoint/2010/main" val="3069468836"/>
+                <p14:modId xmlns:p14="http://schemas.microsoft.com/office/powerpoint/2010/main" val="674226804"/>
               </p:ext>
             </p:extLst>
           </p:nvPr>
@@ -20190,7 +20169,7 @@
                             <a:srgbClr val="FF0000"/>
                           </a:solidFill>
                         </a:rPr>
-                        <a:t>-0.3854</a:t>
+                        <a:t>0.5169</a:t>
                       </a:r>
                     </a:p>
                     <a:p>
@@ -20201,7 +20180,7 @@
                       </a:r>
                       <a:r>
                         <a:rPr lang="en-US" altLang="ko-KR" sz="1400" dirty="0"/>
-                        <a:t>0.0739</a:t>
+                        <a:t>0.0229</a:t>
                       </a:r>
                     </a:p>
                     <a:p>
@@ -20212,7 +20191,7 @@
                       </a:r>
                       <a:r>
                         <a:rPr lang="en-US" altLang="ko-KR" sz="1400" dirty="0"/>
-                        <a:t>0.1788</a:t>
+                        <a:t>0.1216</a:t>
                       </a:r>
                     </a:p>
                     <a:p>
@@ -20222,8 +20201,8 @@
                         <a:t>rmse : </a:t>
                       </a:r>
                       <a:r>
-                        <a:rPr lang="en-US" altLang="ko-KR" sz="1400" dirty="0"/>
-                        <a:t>0.2720</a:t>
+                        <a:rPr lang="en-US" altLang="ko-KR" sz="1400"/>
+                        <a:t>0.1515</a:t>
                       </a:r>
                       <a:endParaRPr lang="pt-BR" altLang="ko-KR" sz="1400" dirty="0"/>
                     </a:p>
@@ -20468,7 +20447,7 @@
           <p:nvPr/>
         </p:nvPicPr>
         <p:blipFill>
-          <a:blip r:embed="rId11">
+          <a:blip r:embed="rId10">
             <a:extLst>
               <a:ext uri="{28A0092B-C50C-407E-A947-70E740481C1C}">
                 <a14:useLocalDpi xmlns:a14="http://schemas.microsoft.com/office/drawing/2010/main" val="0"/>
@@ -20507,7 +20486,7 @@
           <p:nvPr/>
         </p:nvPicPr>
         <p:blipFill>
-          <a:blip r:embed="rId12">
+          <a:blip r:embed="rId11">
             <a:extLst>
               <a:ext uri="{28A0092B-C50C-407E-A947-70E740481C1C}">
                 <a14:useLocalDpi xmlns:a14="http://schemas.microsoft.com/office/drawing/2010/main" val="0"/>
@@ -20543,7 +20522,7 @@
           <p:nvPr/>
         </p:nvPicPr>
         <p:blipFill>
-          <a:blip r:embed="rId13">
+          <a:blip r:embed="rId12">
             <a:extLst>
               <a:ext uri="{28A0092B-C50C-407E-A947-70E740481C1C}">
                 <a14:useLocalDpi xmlns:a14="http://schemas.microsoft.com/office/drawing/2010/main" val="0"/>
@@ -20558,6 +20537,42 @@
           <a:xfrm>
             <a:off x="7608987" y="5407748"/>
             <a:ext cx="2105029" cy="1108371"/>
+          </a:xfrm>
+          <a:prstGeom prst="rect">
+            <a:avLst/>
+          </a:prstGeom>
+        </p:spPr>
+      </p:pic>
+      <p:pic>
+        <p:nvPicPr>
+          <p:cNvPr id="24" name="그림 23">
+            <a:extLst>
+              <a:ext uri="{FF2B5EF4-FFF2-40B4-BE49-F238E27FC236}">
+                <a16:creationId xmlns:a16="http://schemas.microsoft.com/office/drawing/2014/main" id="{13E1FACB-BFCD-4AE8-A90A-75C149C50BB8}"/>
+              </a:ext>
+            </a:extLst>
+          </p:cNvPr>
+          <p:cNvPicPr>
+            <a:picLocks noChangeAspect="1"/>
+          </p:cNvPicPr>
+          <p:nvPr/>
+        </p:nvPicPr>
+        <p:blipFill>
+          <a:blip r:embed="rId13">
+            <a:extLst>
+              <a:ext uri="{28A0092B-C50C-407E-A947-70E740481C1C}">
+                <a14:useLocalDpi xmlns:a14="http://schemas.microsoft.com/office/drawing/2010/main" val="0"/>
+              </a:ext>
+            </a:extLst>
+          </a:blip>
+          <a:stretch>
+            <a:fillRect/>
+          </a:stretch>
+        </p:blipFill>
+        <p:spPr>
+          <a:xfrm>
+            <a:off x="7419558" y="640550"/>
+            <a:ext cx="4470398" cy="676963"/>
           </a:xfrm>
           <a:prstGeom prst="rect">
             <a:avLst/>
@@ -23142,10 +23157,10 @@
       </p:grpSpPr>
       <p:pic>
         <p:nvPicPr>
-          <p:cNvPr id="30" name="그림 29">
-            <a:extLst>
-              <a:ext uri="{FF2B5EF4-FFF2-40B4-BE49-F238E27FC236}">
-                <a16:creationId xmlns:a16="http://schemas.microsoft.com/office/drawing/2014/main" id="{34B44F8C-A4EF-4214-B85D-838A2A05ADA5}"/>
+          <p:cNvPr id="23" name="그림 22">
+            <a:extLst>
+              <a:ext uri="{FF2B5EF4-FFF2-40B4-BE49-F238E27FC236}">
+                <a16:creationId xmlns:a16="http://schemas.microsoft.com/office/drawing/2014/main" id="{A7391C75-C21E-4A50-A9B9-128891DF5904}"/>
               </a:ext>
             </a:extLst>
           </p:cNvPr>
@@ -23168,8 +23183,8 @@
         </p:blipFill>
         <p:spPr>
           <a:xfrm>
-            <a:off x="9762392" y="5416138"/>
-            <a:ext cx="2143724" cy="1114289"/>
+            <a:off x="7466229" y="641227"/>
+            <a:ext cx="4431036" cy="675611"/>
           </a:xfrm>
           <a:prstGeom prst="rect">
             <a:avLst/>
@@ -23178,10 +23193,10 @@
       </p:pic>
       <p:pic>
         <p:nvPicPr>
-          <p:cNvPr id="31" name="그림 30">
-            <a:extLst>
-              <a:ext uri="{FF2B5EF4-FFF2-40B4-BE49-F238E27FC236}">
-                <a16:creationId xmlns:a16="http://schemas.microsoft.com/office/drawing/2014/main" id="{D1DF17EE-4843-4A32-BDAC-03BBE1594C62}"/>
+          <p:cNvPr id="30" name="그림 29">
+            <a:extLst>
+              <a:ext uri="{FF2B5EF4-FFF2-40B4-BE49-F238E27FC236}">
+                <a16:creationId xmlns:a16="http://schemas.microsoft.com/office/drawing/2014/main" id="{34B44F8C-A4EF-4214-B85D-838A2A05ADA5}"/>
               </a:ext>
             </a:extLst>
           </p:cNvPr>
@@ -23204,8 +23219,44 @@
         </p:blipFill>
         <p:spPr>
           <a:xfrm>
-            <a:off x="9758527" y="1400332"/>
-            <a:ext cx="2138738" cy="1111698"/>
+            <a:off x="9762392" y="5416138"/>
+            <a:ext cx="2143724" cy="1114289"/>
+          </a:xfrm>
+          <a:prstGeom prst="rect">
+            <a:avLst/>
+          </a:prstGeom>
+        </p:spPr>
+      </p:pic>
+      <p:pic>
+        <p:nvPicPr>
+          <p:cNvPr id="31" name="그림 30">
+            <a:extLst>
+              <a:ext uri="{FF2B5EF4-FFF2-40B4-BE49-F238E27FC236}">
+                <a16:creationId xmlns:a16="http://schemas.microsoft.com/office/drawing/2014/main" id="{D1DF17EE-4843-4A32-BDAC-03BBE1594C62}"/>
+              </a:ext>
+            </a:extLst>
+          </p:cNvPr>
+          <p:cNvPicPr>
+            <a:picLocks noChangeAspect="1"/>
+          </p:cNvPicPr>
+          <p:nvPr/>
+        </p:nvPicPr>
+        <p:blipFill>
+          <a:blip r:embed="rId4">
+            <a:extLst>
+              <a:ext uri="{28A0092B-C50C-407E-A947-70E740481C1C}">
+                <a14:useLocalDpi xmlns:a14="http://schemas.microsoft.com/office/drawing/2010/main" val="0"/>
+              </a:ext>
+            </a:extLst>
+          </a:blip>
+          <a:stretch>
+            <a:fillRect/>
+          </a:stretch>
+        </p:blipFill>
+        <p:spPr>
+          <a:xfrm>
+            <a:off x="9772222" y="1400332"/>
+            <a:ext cx="2111347" cy="1111698"/>
           </a:xfrm>
           <a:prstGeom prst="rect">
             <a:avLst/>
@@ -23264,7 +23315,7 @@
           <p:nvPr/>
         </p:nvPicPr>
         <p:blipFill>
-          <a:blip r:embed="rId4">
+          <a:blip r:embed="rId5">
             <a:extLst>
               <a:ext uri="{28A0092B-C50C-407E-A947-70E740481C1C}">
                 <a14:useLocalDpi xmlns:a14="http://schemas.microsoft.com/office/drawing/2010/main" val="0"/>
@@ -23326,42 +23377,6 @@
           </a:p>
         </p:txBody>
       </p:sp>
-      <p:pic>
-        <p:nvPicPr>
-          <p:cNvPr id="25" name="그림 24">
-            <a:extLst>
-              <a:ext uri="{FF2B5EF4-FFF2-40B4-BE49-F238E27FC236}">
-                <a16:creationId xmlns:a16="http://schemas.microsoft.com/office/drawing/2014/main" id="{A856132F-CBFF-4D9E-8989-4CB996C9FA0D}"/>
-              </a:ext>
-            </a:extLst>
-          </p:cNvPr>
-          <p:cNvPicPr>
-            <a:picLocks noChangeAspect="1"/>
-          </p:cNvPicPr>
-          <p:nvPr/>
-        </p:nvPicPr>
-        <p:blipFill>
-          <a:blip r:embed="rId5">
-            <a:extLst>
-              <a:ext uri="{28A0092B-C50C-407E-A947-70E740481C1C}">
-                <a14:useLocalDpi xmlns:a14="http://schemas.microsoft.com/office/drawing/2010/main" val="0"/>
-              </a:ext>
-            </a:extLst>
-          </a:blip>
-          <a:stretch>
-            <a:fillRect/>
-          </a:stretch>
-        </p:blipFill>
-        <p:spPr>
-          <a:xfrm>
-            <a:off x="7466229" y="638495"/>
-            <a:ext cx="4431036" cy="681074"/>
-          </a:xfrm>
-          <a:prstGeom prst="rect">
-            <a:avLst/>
-          </a:prstGeom>
-        </p:spPr>
-      </p:pic>
       <p:pic>
         <p:nvPicPr>
           <p:cNvPr id="29" name="그림 28">
@@ -23601,7 +23616,7 @@
           <p:nvPr>
             <p:extLst>
               <p:ext uri="{D42A27DB-BD31-4B8C-83A1-F6EECF244321}">
-                <p14:modId xmlns:p14="http://schemas.microsoft.com/office/powerpoint/2010/main" val="3085992357"/>
+                <p14:modId xmlns:p14="http://schemas.microsoft.com/office/powerpoint/2010/main" val="1568195977"/>
               </p:ext>
             </p:extLst>
           </p:nvPr>
@@ -23705,7 +23720,7 @@
                             <a:srgbClr val="FF0000"/>
                           </a:solidFill>
                         </a:rPr>
-                        <a:t>0.2076</a:t>
+                        <a:t>0.6881</a:t>
                       </a:r>
                     </a:p>
                     <a:p>
@@ -23716,7 +23731,7 @@
                       </a:r>
                       <a:r>
                         <a:rPr lang="en-US" altLang="ko-KR" sz="1400" dirty="0"/>
-                        <a:t>0.0738</a:t>
+                        <a:t>0.0252</a:t>
                       </a:r>
                     </a:p>
                     <a:p>
@@ -23727,7 +23742,7 @@
                       </a:r>
                       <a:r>
                         <a:rPr lang="en-US" altLang="ko-KR" sz="1400" dirty="0"/>
-                        <a:t>0.2107</a:t>
+                        <a:t>0.0894</a:t>
                       </a:r>
                     </a:p>
                     <a:p>
@@ -23738,7 +23753,7 @@
                       </a:r>
                       <a:r>
                         <a:rPr lang="en-US" altLang="ko-KR" sz="1400" dirty="0"/>
-                        <a:t>0.2717</a:t>
+                        <a:t>0.1588</a:t>
                       </a:r>
                       <a:endParaRPr lang="pt-BR" altLang="ko-KR" sz="1400" dirty="0"/>
                     </a:p>
@@ -24648,7 +24663,7 @@
           <p:nvPr>
             <p:extLst>
               <p:ext uri="{D42A27DB-BD31-4B8C-83A1-F6EECF244321}">
-                <p14:modId xmlns:p14="http://schemas.microsoft.com/office/powerpoint/2010/main" val="3369823678"/>
+                <p14:modId xmlns:p14="http://schemas.microsoft.com/office/powerpoint/2010/main" val="3268131589"/>
               </p:ext>
             </p:extLst>
           </p:nvPr>
@@ -24747,14 +24762,13 @@
                         <a:t>r2 : </a:t>
                       </a:r>
                       <a:r>
-                        <a:rPr lang="en-US" altLang="ko-KR" sz="1400" dirty="0"/>
+                        <a:rPr lang="en-US" altLang="ko-KR" sz="1400" dirty="0">
+                          <a:solidFill>
+                            <a:srgbClr val="FF0000"/>
+                          </a:solidFill>
+                        </a:rPr>
                         <a:t>0.7919</a:t>
                       </a:r>
-                      <a:endParaRPr lang="en-US" altLang="ko-KR" sz="1400" dirty="0">
-                        <a:solidFill>
-                          <a:srgbClr val="FF0000"/>
-                        </a:solidFill>
-                      </a:endParaRPr>
                     </a:p>
                     <a:p>
                       <a:pPr algn="ctr"/>
@@ -24906,7 +24920,11 @@
                         <a:t>r2 : </a:t>
                       </a:r>
                       <a:r>
-                        <a:rPr lang="en-US" altLang="ko-KR" sz="1400" dirty="0"/>
+                        <a:rPr lang="en-US" altLang="ko-KR" sz="1400" dirty="0">
+                          <a:solidFill>
+                            <a:srgbClr val="FF0000"/>
+                          </a:solidFill>
+                        </a:rPr>
                         <a:t>0.7375</a:t>
                       </a:r>
                       <a:endParaRPr lang="pt-BR" altLang="ko-KR" sz="1400" dirty="0">
@@ -25297,8 +25315,8 @@
         </p:blipFill>
         <p:spPr>
           <a:xfrm>
-            <a:off x="9767009" y="1398748"/>
-            <a:ext cx="2121773" cy="1114867"/>
+            <a:off x="9767009" y="1402053"/>
+            <a:ext cx="2121773" cy="1108257"/>
           </a:xfrm>
           <a:prstGeom prst="rect">
             <a:avLst/>
@@ -25447,8 +25465,8 @@
         </p:blipFill>
         <p:spPr>
           <a:xfrm>
-            <a:off x="7419558" y="638495"/>
-            <a:ext cx="4470398" cy="681074"/>
+            <a:off x="7419558" y="640550"/>
+            <a:ext cx="4470398" cy="676963"/>
           </a:xfrm>
           <a:prstGeom prst="rect">
             <a:avLst/>
@@ -25694,7 +25712,7 @@
           <p:nvPr>
             <p:extLst>
               <p:ext uri="{D42A27DB-BD31-4B8C-83A1-F6EECF244321}">
-                <p14:modId xmlns:p14="http://schemas.microsoft.com/office/powerpoint/2010/main" val="3423375795"/>
+                <p14:modId xmlns:p14="http://schemas.microsoft.com/office/powerpoint/2010/main" val="1840152115"/>
               </p:ext>
             </p:extLst>
           </p:nvPr>
@@ -25801,14 +25819,13 @@
                         <a:t>r2 :  </a:t>
                       </a:r>
                       <a:r>
-                        <a:rPr lang="en-US" altLang="ko-KR" sz="1400" dirty="0"/>
-                        <a:t>-0.2098</a:t>
-                      </a:r>
-                      <a:endParaRPr lang="en-US" altLang="ko-KR" sz="1400" dirty="0">
-                        <a:solidFill>
-                          <a:srgbClr val="FF0000"/>
-                        </a:solidFill>
-                      </a:endParaRPr>
+                        <a:rPr lang="en-US" altLang="ko-KR" sz="1400" dirty="0">
+                          <a:solidFill>
+                            <a:srgbClr val="FF0000"/>
+                          </a:solidFill>
+                        </a:rPr>
+                        <a:t>0.7102</a:t>
+                      </a:r>
                     </a:p>
                     <a:p>
                       <a:pPr algn="ctr"/>
@@ -25818,7 +25835,7 @@
                       </a:r>
                       <a:r>
                         <a:rPr lang="en-US" altLang="ko-KR" sz="1400" dirty="0"/>
-                        <a:t>0.0646</a:t>
+                        <a:t>0.0137</a:t>
                       </a:r>
                     </a:p>
                     <a:p>
@@ -25829,7 +25846,7 @@
                       </a:r>
                       <a:r>
                         <a:rPr lang="en-US" altLang="ko-KR" sz="1400" dirty="0"/>
-                        <a:t>0.1757</a:t>
+                        <a:t>0.0793</a:t>
                       </a:r>
                     </a:p>
                     <a:p>
@@ -25840,7 +25857,7 @@
                       </a:r>
                       <a:r>
                         <a:rPr lang="en-US" altLang="ko-KR" sz="1400" dirty="0"/>
-                        <a:t>0.2542</a:t>
+                        <a:t>0.1173</a:t>
                       </a:r>
                       <a:endParaRPr lang="pt-BR" altLang="ko-KR" sz="1400" dirty="0"/>
                     </a:p>
@@ -25956,7 +25973,11 @@
                         <a:t>r2 : </a:t>
                       </a:r>
                       <a:r>
-                        <a:rPr lang="en-US" altLang="ko-KR" sz="1400" dirty="0"/>
+                        <a:rPr lang="en-US" altLang="ko-KR" sz="1400" dirty="0">
+                          <a:solidFill>
+                            <a:srgbClr val="FF0000"/>
+                          </a:solidFill>
+                        </a:rPr>
                         <a:t>0.7751</a:t>
                       </a:r>
                       <a:endParaRPr lang="pt-BR" altLang="ko-KR" sz="1400" dirty="0">
@@ -25996,7 +26017,7 @@
                         <a:t>rmse : </a:t>
                       </a:r>
                       <a:r>
-                        <a:rPr lang="en-US" altLang="ko-KR" sz="1400"/>
+                        <a:rPr lang="en-US" altLang="ko-KR" sz="1400" dirty="0"/>
                         <a:t>0.2793</a:t>
                       </a:r>
                       <a:endParaRPr lang="ko-KR" altLang="en-US" sz="1400" b="0" dirty="0"/>
@@ -27316,10 +27337,10 @@
       </p:grpSpPr>
       <p:pic>
         <p:nvPicPr>
-          <p:cNvPr id="30" name="그림 29">
-            <a:extLst>
-              <a:ext uri="{FF2B5EF4-FFF2-40B4-BE49-F238E27FC236}">
-                <a16:creationId xmlns:a16="http://schemas.microsoft.com/office/drawing/2014/main" id="{34B44F8C-A4EF-4214-B85D-838A2A05ADA5}"/>
+          <p:cNvPr id="21" name="그림 20">
+            <a:extLst>
+              <a:ext uri="{FF2B5EF4-FFF2-40B4-BE49-F238E27FC236}">
+                <a16:creationId xmlns:a16="http://schemas.microsoft.com/office/drawing/2014/main" id="{2D5E4318-7ED3-4009-BF67-7F4E2BE3091C}"/>
               </a:ext>
             </a:extLst>
           </p:cNvPr>
@@ -27342,8 +27363,8 @@
         </p:blipFill>
         <p:spPr>
           <a:xfrm>
-            <a:off x="9762392" y="5416718"/>
-            <a:ext cx="2143724" cy="1113130"/>
+            <a:off x="7466229" y="641227"/>
+            <a:ext cx="4431036" cy="675611"/>
           </a:xfrm>
           <a:prstGeom prst="rect">
             <a:avLst/>
@@ -27352,10 +27373,10 @@
       </p:pic>
       <p:pic>
         <p:nvPicPr>
-          <p:cNvPr id="31" name="그림 30">
-            <a:extLst>
-              <a:ext uri="{FF2B5EF4-FFF2-40B4-BE49-F238E27FC236}">
-                <a16:creationId xmlns:a16="http://schemas.microsoft.com/office/drawing/2014/main" id="{D1DF17EE-4843-4A32-BDAC-03BBE1594C62}"/>
+          <p:cNvPr id="30" name="그림 29">
+            <a:extLst>
+              <a:ext uri="{FF2B5EF4-FFF2-40B4-BE49-F238E27FC236}">
+                <a16:creationId xmlns:a16="http://schemas.microsoft.com/office/drawing/2014/main" id="{34B44F8C-A4EF-4214-B85D-838A2A05ADA5}"/>
               </a:ext>
             </a:extLst>
           </p:cNvPr>
@@ -27378,8 +27399,44 @@
         </p:blipFill>
         <p:spPr>
           <a:xfrm>
-            <a:off x="9758527" y="1395877"/>
-            <a:ext cx="2138738" cy="1120609"/>
+            <a:off x="9762392" y="5416718"/>
+            <a:ext cx="2143724" cy="1113130"/>
+          </a:xfrm>
+          <a:prstGeom prst="rect">
+            <a:avLst/>
+          </a:prstGeom>
+        </p:spPr>
+      </p:pic>
+      <p:pic>
+        <p:nvPicPr>
+          <p:cNvPr id="31" name="그림 30">
+            <a:extLst>
+              <a:ext uri="{FF2B5EF4-FFF2-40B4-BE49-F238E27FC236}">
+                <a16:creationId xmlns:a16="http://schemas.microsoft.com/office/drawing/2014/main" id="{D1DF17EE-4843-4A32-BDAC-03BBE1594C62}"/>
+              </a:ext>
+            </a:extLst>
+          </p:cNvPr>
+          <p:cNvPicPr>
+            <a:picLocks noChangeAspect="1"/>
+          </p:cNvPicPr>
+          <p:nvPr/>
+        </p:nvPicPr>
+        <p:blipFill>
+          <a:blip r:embed="rId4">
+            <a:extLst>
+              <a:ext uri="{28A0092B-C50C-407E-A947-70E740481C1C}">
+                <a14:useLocalDpi xmlns:a14="http://schemas.microsoft.com/office/drawing/2010/main" val="0"/>
+              </a:ext>
+            </a:extLst>
+          </a:blip>
+          <a:stretch>
+            <a:fillRect/>
+          </a:stretch>
+        </p:blipFill>
+        <p:spPr>
+          <a:xfrm>
+            <a:off x="9758527" y="1398685"/>
+            <a:ext cx="2138738" cy="1114992"/>
           </a:xfrm>
           <a:prstGeom prst="rect">
             <a:avLst/>
@@ -27438,7 +27495,7 @@
           <p:nvPr/>
         </p:nvPicPr>
         <p:blipFill>
-          <a:blip r:embed="rId4">
+          <a:blip r:embed="rId5">
             <a:extLst>
               <a:ext uri="{28A0092B-C50C-407E-A947-70E740481C1C}">
                 <a14:useLocalDpi xmlns:a14="http://schemas.microsoft.com/office/drawing/2010/main" val="0"/>
@@ -27500,42 +27557,6 @@
           </a:p>
         </p:txBody>
       </p:sp>
-      <p:pic>
-        <p:nvPicPr>
-          <p:cNvPr id="25" name="그림 24">
-            <a:extLst>
-              <a:ext uri="{FF2B5EF4-FFF2-40B4-BE49-F238E27FC236}">
-                <a16:creationId xmlns:a16="http://schemas.microsoft.com/office/drawing/2014/main" id="{A856132F-CBFF-4D9E-8989-4CB996C9FA0D}"/>
-              </a:ext>
-            </a:extLst>
-          </p:cNvPr>
-          <p:cNvPicPr>
-            <a:picLocks noChangeAspect="1"/>
-          </p:cNvPicPr>
-          <p:nvPr/>
-        </p:nvPicPr>
-        <p:blipFill>
-          <a:blip r:embed="rId5">
-            <a:extLst>
-              <a:ext uri="{28A0092B-C50C-407E-A947-70E740481C1C}">
-                <a14:useLocalDpi xmlns:a14="http://schemas.microsoft.com/office/drawing/2010/main" val="0"/>
-              </a:ext>
-            </a:extLst>
-          </a:blip>
-          <a:stretch>
-            <a:fillRect/>
-          </a:stretch>
-        </p:blipFill>
-        <p:spPr>
-          <a:xfrm>
-            <a:off x="7466229" y="638495"/>
-            <a:ext cx="4431036" cy="681074"/>
-          </a:xfrm>
-          <a:prstGeom prst="rect">
-            <a:avLst/>
-          </a:prstGeom>
-        </p:spPr>
-      </p:pic>
       <p:pic>
         <p:nvPicPr>
           <p:cNvPr id="29" name="그림 28">
@@ -27775,7 +27796,7 @@
           <p:nvPr>
             <p:extLst>
               <p:ext uri="{D42A27DB-BD31-4B8C-83A1-F6EECF244321}">
-                <p14:modId xmlns:p14="http://schemas.microsoft.com/office/powerpoint/2010/main" val="3312704481"/>
+                <p14:modId xmlns:p14="http://schemas.microsoft.com/office/powerpoint/2010/main" val="1144313575"/>
               </p:ext>
             </p:extLst>
           </p:nvPr>
@@ -27879,7 +27900,7 @@
                             <a:srgbClr val="FF0000"/>
                           </a:solidFill>
                         </a:rPr>
-                        <a:t>-0.2207</a:t>
+                        <a:t>0.7393</a:t>
                       </a:r>
                     </a:p>
                     <a:p>
@@ -27890,7 +27911,7 @@
                       </a:r>
                       <a:r>
                         <a:rPr lang="en-US" altLang="ko-KR" sz="1400" dirty="0"/>
-                        <a:t>0.1137</a:t>
+                        <a:t>0.0210</a:t>
                       </a:r>
                     </a:p>
                     <a:p>
@@ -27901,7 +27922,7 @@
                       </a:r>
                       <a:r>
                         <a:rPr lang="en-US" altLang="ko-KR" sz="1400" dirty="0"/>
-                        <a:t>0.2756</a:t>
+                        <a:t>0.0843</a:t>
                       </a:r>
                     </a:p>
                     <a:p>
@@ -27912,7 +27933,7 @@
                       </a:r>
                       <a:r>
                         <a:rPr lang="en-US" altLang="ko-KR" sz="1400" dirty="0"/>
-                        <a:t>0.3372</a:t>
+                        <a:t>0.1452</a:t>
                       </a:r>
                       <a:endParaRPr lang="pt-BR" altLang="ko-KR" sz="1400" dirty="0"/>
                     </a:p>
